--- a/docs/pptx/whole/ritu-linsubhr-ratio-hosp1_10pct.pptx
+++ b/docs/pptx/whole/ritu-linsubhr-ratio-hosp1_10pct.pptx
@@ -2443,7 +2443,7 @@
           </p:nvSpPr>
           <p:spPr>
             <a:xfrm>
-              <a:off x="955490" y="2073503"/>
+              <a:off x="957589" y="2073503"/>
               <a:ext cx="0" cy="3649639"/>
             </a:xfrm>
             <a:custGeom>
@@ -2486,7 +2486,7 @@
           </p:nvSpPr>
           <p:spPr>
             <a:xfrm>
-              <a:off x="1892768" y="2073503"/>
+              <a:off x="1893867" y="2073503"/>
               <a:ext cx="0" cy="3649639"/>
             </a:xfrm>
             <a:custGeom>
@@ -2529,7 +2529,7 @@
           </p:nvSpPr>
           <p:spPr>
             <a:xfrm>
-              <a:off x="2830046" y="2073503"/>
+              <a:off x="2830144" y="2073503"/>
               <a:ext cx="0" cy="3649639"/>
             </a:xfrm>
             <a:custGeom>
@@ -2572,7 +2572,7 @@
           </p:nvSpPr>
           <p:spPr>
             <a:xfrm>
-              <a:off x="3767323" y="2073503"/>
+              <a:off x="3766422" y="2073503"/>
               <a:ext cx="0" cy="3649639"/>
             </a:xfrm>
             <a:custGeom>
@@ -2615,7 +2615,7 @@
           </p:nvSpPr>
           <p:spPr>
             <a:xfrm>
-              <a:off x="4704601" y="2073503"/>
+              <a:off x="4702700" y="2073503"/>
               <a:ext cx="0" cy="3649639"/>
             </a:xfrm>
             <a:custGeom>
@@ -2658,7 +2658,7 @@
           </p:nvSpPr>
           <p:spPr>
             <a:xfrm>
-              <a:off x="5641878" y="2073503"/>
+              <a:off x="5638978" y="2073503"/>
               <a:ext cx="0" cy="3649639"/>
             </a:xfrm>
             <a:custGeom>
@@ -2701,7 +2701,7 @@
           </p:nvSpPr>
           <p:spPr>
             <a:xfrm>
-              <a:off x="6579156" y="2073503"/>
+              <a:off x="6575256" y="2073503"/>
               <a:ext cx="0" cy="3649639"/>
             </a:xfrm>
             <a:custGeom>
@@ -2744,7 +2744,7 @@
           </p:nvSpPr>
           <p:spPr>
             <a:xfrm>
-              <a:off x="7516433" y="2073503"/>
+              <a:off x="7511534" y="2073503"/>
               <a:ext cx="0" cy="3649639"/>
             </a:xfrm>
             <a:custGeom>
@@ -2787,7 +2787,7 @@
           </p:nvSpPr>
           <p:spPr>
             <a:xfrm>
-              <a:off x="8453711" y="2073503"/>
+              <a:off x="8447812" y="2073503"/>
               <a:ext cx="0" cy="3649639"/>
             </a:xfrm>
             <a:custGeom>
@@ -3045,7 +3045,7 @@
           </p:nvSpPr>
           <p:spPr>
             <a:xfrm>
-              <a:off x="1424129" y="2073503"/>
+              <a:off x="1425728" y="2073503"/>
               <a:ext cx="0" cy="3649639"/>
             </a:xfrm>
             <a:custGeom>
@@ -3088,7 +3088,7 @@
           </p:nvSpPr>
           <p:spPr>
             <a:xfrm>
-              <a:off x="2361407" y="2073503"/>
+              <a:off x="2362006" y="2073503"/>
               <a:ext cx="0" cy="3649639"/>
             </a:xfrm>
             <a:custGeom>
@@ -3131,7 +3131,7 @@
           </p:nvSpPr>
           <p:spPr>
             <a:xfrm>
-              <a:off x="3298684" y="2073503"/>
+              <a:off x="3298283" y="2073503"/>
               <a:ext cx="0" cy="3649639"/>
             </a:xfrm>
             <a:custGeom>
@@ -3174,7 +3174,7 @@
           </p:nvSpPr>
           <p:spPr>
             <a:xfrm>
-              <a:off x="4235962" y="2073503"/>
+              <a:off x="4234561" y="2073503"/>
               <a:ext cx="0" cy="3649639"/>
             </a:xfrm>
             <a:custGeom>
@@ -3217,7 +3217,7 @@
           </p:nvSpPr>
           <p:spPr>
             <a:xfrm>
-              <a:off x="5173239" y="2073503"/>
+              <a:off x="5170839" y="2073503"/>
               <a:ext cx="0" cy="3649639"/>
             </a:xfrm>
             <a:custGeom>
@@ -3260,7 +3260,7 @@
           </p:nvSpPr>
           <p:spPr>
             <a:xfrm>
-              <a:off x="6110517" y="2073503"/>
+              <a:off x="6107117" y="2073503"/>
               <a:ext cx="0" cy="3649639"/>
             </a:xfrm>
             <a:custGeom>
@@ -3303,7 +3303,7 @@
           </p:nvSpPr>
           <p:spPr>
             <a:xfrm>
-              <a:off x="7047795" y="2073503"/>
+              <a:off x="7043395" y="2073503"/>
               <a:ext cx="0" cy="3649639"/>
             </a:xfrm>
             <a:custGeom>
@@ -3346,7 +3346,7 @@
           </p:nvSpPr>
           <p:spPr>
             <a:xfrm>
-              <a:off x="7985072" y="2073503"/>
+              <a:off x="7979673" y="2073503"/>
               <a:ext cx="0" cy="3649639"/>
             </a:xfrm>
             <a:custGeom>
@@ -3390,551 +3390,554 @@
           <p:spPr>
             <a:xfrm>
               <a:off x="1172049" y="2073503"/>
-              <a:ext cx="7090630" cy="3454966"/>
+              <a:ext cx="7090630" cy="3453288"/>
             </a:xfrm>
             <a:custGeom>
               <a:avLst/>
               <a:pathLst>
-                <a:path w="7090630" h="3454966">
+                <a:path w="7090630" h="3453288">
                   <a:moveTo>
-                    <a:pt x="1455976" y="0"/>
+                    <a:pt x="1427092" y="0"/>
                   </a:moveTo>
                   <a:lnTo>
-                    <a:pt x="1504073" y="141090"/>
-                  </a:lnTo>
-                  <a:lnTo>
-                    <a:pt x="1575695" y="338770"/>
-                  </a:lnTo>
-                  <a:lnTo>
-                    <a:pt x="1647318" y="524759"/>
-                  </a:lnTo>
-                  <a:lnTo>
-                    <a:pt x="1718940" y="699749"/>
-                  </a:lnTo>
-                  <a:lnTo>
-                    <a:pt x="1790563" y="864391"/>
-                  </a:lnTo>
-                  <a:lnTo>
-                    <a:pt x="1862185" y="1019295"/>
-                  </a:lnTo>
-                  <a:lnTo>
-                    <a:pt x="1933808" y="1165039"/>
-                  </a:lnTo>
-                  <a:lnTo>
-                    <a:pt x="2005430" y="1302164"/>
-                  </a:lnTo>
-                  <a:lnTo>
-                    <a:pt x="2077053" y="1431180"/>
-                  </a:lnTo>
-                  <a:lnTo>
-                    <a:pt x="2148675" y="1552565"/>
-                  </a:lnTo>
-                  <a:lnTo>
-                    <a:pt x="2220298" y="1666772"/>
-                  </a:lnTo>
-                  <a:lnTo>
-                    <a:pt x="2291920" y="1774226"/>
-                  </a:lnTo>
-                  <a:lnTo>
-                    <a:pt x="2363543" y="1875324"/>
-                  </a:lnTo>
-                  <a:lnTo>
-                    <a:pt x="2435165" y="1970444"/>
-                  </a:lnTo>
-                  <a:lnTo>
-                    <a:pt x="2506788" y="2059938"/>
-                  </a:lnTo>
-                  <a:lnTo>
-                    <a:pt x="2578410" y="2144140"/>
-                  </a:lnTo>
-                  <a:lnTo>
-                    <a:pt x="2650033" y="2223362"/>
-                  </a:lnTo>
-                  <a:lnTo>
-                    <a:pt x="2721655" y="2297900"/>
-                  </a:lnTo>
-                  <a:lnTo>
-                    <a:pt x="2793278" y="2368029"/>
-                  </a:lnTo>
-                  <a:lnTo>
-                    <a:pt x="2864901" y="2434011"/>
-                  </a:lnTo>
-                  <a:lnTo>
-                    <a:pt x="2936523" y="2496090"/>
-                  </a:lnTo>
-                  <a:lnTo>
-                    <a:pt x="3008146" y="2554499"/>
-                  </a:lnTo>
-                  <a:lnTo>
-                    <a:pt x="3079768" y="2609453"/>
-                  </a:lnTo>
-                  <a:lnTo>
-                    <a:pt x="3151391" y="2652234"/>
-                  </a:lnTo>
-                  <a:lnTo>
-                    <a:pt x="3223013" y="2637071"/>
-                  </a:lnTo>
-                  <a:lnTo>
-                    <a:pt x="3294636" y="2621631"/>
-                  </a:lnTo>
-                  <a:lnTo>
-                    <a:pt x="3366258" y="2605910"/>
-                  </a:lnTo>
-                  <a:lnTo>
-                    <a:pt x="3437881" y="2589902"/>
-                  </a:lnTo>
-                  <a:lnTo>
-                    <a:pt x="3509503" y="2573602"/>
-                  </a:lnTo>
-                  <a:lnTo>
-                    <a:pt x="3581126" y="2557005"/>
-                  </a:lnTo>
-                  <a:lnTo>
-                    <a:pt x="3652748" y="2540106"/>
-                  </a:lnTo>
-                  <a:lnTo>
-                    <a:pt x="3724371" y="2522898"/>
-                  </a:lnTo>
-                  <a:lnTo>
-                    <a:pt x="3795993" y="2505376"/>
-                  </a:lnTo>
-                  <a:lnTo>
-                    <a:pt x="3867616" y="2487535"/>
-                  </a:lnTo>
-                  <a:lnTo>
-                    <a:pt x="3939238" y="2469369"/>
-                  </a:lnTo>
-                  <a:lnTo>
-                    <a:pt x="4010861" y="2450871"/>
-                  </a:lnTo>
-                  <a:lnTo>
-                    <a:pt x="4082483" y="2432036"/>
-                  </a:lnTo>
-                  <a:lnTo>
-                    <a:pt x="4154106" y="2412857"/>
-                  </a:lnTo>
-                  <a:lnTo>
-                    <a:pt x="4225729" y="2393329"/>
-                  </a:lnTo>
-                  <a:lnTo>
-                    <a:pt x="4297351" y="2373445"/>
-                  </a:lnTo>
-                  <a:lnTo>
-                    <a:pt x="4368974" y="2353198"/>
-                  </a:lnTo>
-                  <a:lnTo>
-                    <a:pt x="4440596" y="2332582"/>
-                  </a:lnTo>
-                  <a:lnTo>
-                    <a:pt x="4512219" y="2311589"/>
-                  </a:lnTo>
-                  <a:lnTo>
-                    <a:pt x="4583841" y="2290215"/>
-                  </a:lnTo>
-                  <a:lnTo>
-                    <a:pt x="4655464" y="2268450"/>
-                  </a:lnTo>
-                  <a:lnTo>
-                    <a:pt x="4727086" y="2246288"/>
-                  </a:lnTo>
-                  <a:lnTo>
-                    <a:pt x="4798709" y="2223722"/>
-                  </a:lnTo>
-                  <a:lnTo>
-                    <a:pt x="4870331" y="2200745"/>
-                  </a:lnTo>
-                  <a:lnTo>
-                    <a:pt x="4941954" y="2177349"/>
-                  </a:lnTo>
-                  <a:lnTo>
-                    <a:pt x="5013576" y="2153526"/>
-                  </a:lnTo>
-                  <a:lnTo>
-                    <a:pt x="5085199" y="2129269"/>
-                  </a:lnTo>
-                  <a:lnTo>
-                    <a:pt x="5156821" y="2104569"/>
-                  </a:lnTo>
-                  <a:lnTo>
-                    <a:pt x="5228444" y="2079419"/>
-                  </a:lnTo>
-                  <a:lnTo>
-                    <a:pt x="5300066" y="2053810"/>
-                  </a:lnTo>
-                  <a:lnTo>
-                    <a:pt x="5371689" y="2027735"/>
-                  </a:lnTo>
-                  <a:lnTo>
-                    <a:pt x="5443311" y="2001183"/>
-                  </a:lnTo>
-                  <a:lnTo>
-                    <a:pt x="5514934" y="1974148"/>
-                  </a:lnTo>
-                  <a:lnTo>
-                    <a:pt x="5586557" y="1946620"/>
-                  </a:lnTo>
-                  <a:lnTo>
-                    <a:pt x="5658179" y="1918589"/>
-                  </a:lnTo>
-                  <a:lnTo>
-                    <a:pt x="5729802" y="1890048"/>
-                  </a:lnTo>
-                  <a:lnTo>
-                    <a:pt x="5801424" y="1860986"/>
-                  </a:lnTo>
-                  <a:lnTo>
-                    <a:pt x="5873047" y="1831394"/>
-                  </a:lnTo>
-                  <a:lnTo>
-                    <a:pt x="5944669" y="1801262"/>
-                  </a:lnTo>
-                  <a:lnTo>
-                    <a:pt x="6016292" y="1770581"/>
-                  </a:lnTo>
-                  <a:lnTo>
-                    <a:pt x="6087914" y="1739341"/>
-                  </a:lnTo>
-                  <a:lnTo>
-                    <a:pt x="6159537" y="1707530"/>
-                  </a:lnTo>
-                  <a:lnTo>
-                    <a:pt x="6231159" y="1675140"/>
-                  </a:lnTo>
-                  <a:lnTo>
-                    <a:pt x="6302782" y="1642159"/>
-                  </a:lnTo>
-                  <a:lnTo>
-                    <a:pt x="6374404" y="1608577"/>
-                  </a:lnTo>
-                  <a:lnTo>
-                    <a:pt x="6446027" y="1574382"/>
-                  </a:lnTo>
-                  <a:lnTo>
-                    <a:pt x="6517649" y="1539564"/>
-                  </a:lnTo>
-                  <a:lnTo>
-                    <a:pt x="6589272" y="1504111"/>
-                  </a:lnTo>
-                  <a:lnTo>
-                    <a:pt x="6660894" y="1468011"/>
-                  </a:lnTo>
-                  <a:lnTo>
-                    <a:pt x="6732517" y="1431253"/>
-                  </a:lnTo>
-                  <a:lnTo>
-                    <a:pt x="6804139" y="1393824"/>
-                  </a:lnTo>
-                  <a:lnTo>
-                    <a:pt x="6875762" y="1355713"/>
-                  </a:lnTo>
-                  <a:lnTo>
-                    <a:pt x="6947385" y="1316908"/>
-                  </a:lnTo>
-                  <a:lnTo>
-                    <a:pt x="7019007" y="1277394"/>
-                  </a:lnTo>
-                  <a:lnTo>
-                    <a:pt x="7090630" y="1237160"/>
-                  </a:lnTo>
-                  <a:lnTo>
-                    <a:pt x="7090630" y="3454966"/>
-                  </a:lnTo>
-                  <a:lnTo>
-                    <a:pt x="7019007" y="3453157"/>
-                  </a:lnTo>
-                  <a:lnTo>
-                    <a:pt x="6947385" y="3451234"/>
-                  </a:lnTo>
-                  <a:lnTo>
-                    <a:pt x="6875762" y="3449191"/>
-                  </a:lnTo>
-                  <a:lnTo>
-                    <a:pt x="6804139" y="3447019"/>
-                  </a:lnTo>
-                  <a:lnTo>
-                    <a:pt x="6732517" y="3444710"/>
-                  </a:lnTo>
-                  <a:lnTo>
-                    <a:pt x="6660894" y="3442257"/>
-                  </a:lnTo>
-                  <a:lnTo>
-                    <a:pt x="6589272" y="3439649"/>
-                  </a:lnTo>
-                  <a:lnTo>
-                    <a:pt x="6517649" y="3436877"/>
-                  </a:lnTo>
-                  <a:lnTo>
-                    <a:pt x="6446027" y="3433931"/>
-                  </a:lnTo>
-                  <a:lnTo>
-                    <a:pt x="6374404" y="3430800"/>
-                  </a:lnTo>
-                  <a:lnTo>
-                    <a:pt x="6302782" y="3427472"/>
-                  </a:lnTo>
-                  <a:lnTo>
-                    <a:pt x="6231159" y="3423934"/>
-                  </a:lnTo>
-                  <a:lnTo>
-                    <a:pt x="6159537" y="3420175"/>
-                  </a:lnTo>
-                  <a:lnTo>
-                    <a:pt x="6087914" y="3416179"/>
-                  </a:lnTo>
-                  <a:lnTo>
-                    <a:pt x="6016292" y="3411932"/>
-                  </a:lnTo>
-                  <a:lnTo>
-                    <a:pt x="5944669" y="3407418"/>
-                  </a:lnTo>
-                  <a:lnTo>
-                    <a:pt x="5873047" y="3402621"/>
-                  </a:lnTo>
-                  <a:lnTo>
-                    <a:pt x="5801424" y="3397521"/>
-                  </a:lnTo>
-                  <a:lnTo>
-                    <a:pt x="5729802" y="3392102"/>
-                  </a:lnTo>
-                  <a:lnTo>
-                    <a:pt x="5658179" y="3386341"/>
-                  </a:lnTo>
-                  <a:lnTo>
-                    <a:pt x="5586557" y="3380219"/>
-                  </a:lnTo>
-                  <a:lnTo>
-                    <a:pt x="5514934" y="3373711"/>
-                  </a:lnTo>
-                  <a:lnTo>
-                    <a:pt x="5443311" y="3366795"/>
-                  </a:lnTo>
-                  <a:lnTo>
-                    <a:pt x="5371689" y="3359444"/>
-                  </a:lnTo>
-                  <a:lnTo>
-                    <a:pt x="5300066" y="3351631"/>
-                  </a:lnTo>
-                  <a:lnTo>
-                    <a:pt x="5228444" y="3343327"/>
-                  </a:lnTo>
-                  <a:lnTo>
-                    <a:pt x="5156821" y="3334501"/>
-                  </a:lnTo>
-                  <a:lnTo>
-                    <a:pt x="5085199" y="3325120"/>
-                  </a:lnTo>
-                  <a:lnTo>
-                    <a:pt x="5013576" y="3315149"/>
-                  </a:lnTo>
-                  <a:lnTo>
-                    <a:pt x="4941954" y="3304552"/>
-                  </a:lnTo>
-                  <a:lnTo>
-                    <a:pt x="4870331" y="3293288"/>
-                  </a:lnTo>
-                  <a:lnTo>
-                    <a:pt x="4798709" y="3281317"/>
-                  </a:lnTo>
-                  <a:lnTo>
-                    <a:pt x="4727086" y="3268593"/>
-                  </a:lnTo>
-                  <a:lnTo>
-                    <a:pt x="4655464" y="3255069"/>
-                  </a:lnTo>
-                  <a:lnTo>
-                    <a:pt x="4583841" y="3240696"/>
-                  </a:lnTo>
-                  <a:lnTo>
-                    <a:pt x="4512219" y="3225419"/>
-                  </a:lnTo>
-                  <a:lnTo>
-                    <a:pt x="4440596" y="3209181"/>
-                  </a:lnTo>
-                  <a:lnTo>
-                    <a:pt x="4368974" y="3191923"/>
-                  </a:lnTo>
-                  <a:lnTo>
-                    <a:pt x="4297351" y="3173581"/>
-                  </a:lnTo>
-                  <a:lnTo>
-                    <a:pt x="4225729" y="3154085"/>
-                  </a:lnTo>
-                  <a:lnTo>
-                    <a:pt x="4154106" y="3133364"/>
-                  </a:lnTo>
-                  <a:lnTo>
-                    <a:pt x="4082483" y="3111340"/>
-                  </a:lnTo>
-                  <a:lnTo>
-                    <a:pt x="4010861" y="3087932"/>
-                  </a:lnTo>
-                  <a:lnTo>
-                    <a:pt x="3939238" y="3063053"/>
-                  </a:lnTo>
-                  <a:lnTo>
-                    <a:pt x="3867616" y="3036610"/>
-                  </a:lnTo>
-                  <a:lnTo>
-                    <a:pt x="3795993" y="3008505"/>
-                  </a:lnTo>
-                  <a:lnTo>
-                    <a:pt x="3724371" y="2978634"/>
-                  </a:lnTo>
-                  <a:lnTo>
-                    <a:pt x="3652748" y="2946884"/>
-                  </a:lnTo>
-                  <a:lnTo>
-                    <a:pt x="3581126" y="2913140"/>
-                  </a:lnTo>
-                  <a:lnTo>
-                    <a:pt x="3509503" y="2877274"/>
-                  </a:lnTo>
-                  <a:lnTo>
-                    <a:pt x="3437881" y="2839153"/>
-                  </a:lnTo>
-                  <a:lnTo>
-                    <a:pt x="3366258" y="2798637"/>
-                  </a:lnTo>
-                  <a:lnTo>
-                    <a:pt x="3294636" y="2755574"/>
-                  </a:lnTo>
-                  <a:lnTo>
-                    <a:pt x="3223013" y="2709804"/>
-                  </a:lnTo>
-                  <a:lnTo>
-                    <a:pt x="3151391" y="2661158"/>
-                  </a:lnTo>
-                  <a:lnTo>
-                    <a:pt x="3079768" y="2667125"/>
-                  </a:lnTo>
-                  <a:lnTo>
-                    <a:pt x="3008146" y="2681750"/>
-                  </a:lnTo>
-                  <a:lnTo>
-                    <a:pt x="2936523" y="2696113"/>
-                  </a:lnTo>
-                  <a:lnTo>
-                    <a:pt x="2864901" y="2710219"/>
-                  </a:lnTo>
-                  <a:lnTo>
-                    <a:pt x="2793278" y="2724072"/>
-                  </a:lnTo>
-                  <a:lnTo>
-                    <a:pt x="2721655" y="2737677"/>
-                  </a:lnTo>
-                  <a:lnTo>
-                    <a:pt x="2650033" y="2751038"/>
-                  </a:lnTo>
-                  <a:lnTo>
-                    <a:pt x="2578410" y="2764160"/>
-                  </a:lnTo>
-                  <a:lnTo>
-                    <a:pt x="2506788" y="2777047"/>
-                  </a:lnTo>
-                  <a:lnTo>
-                    <a:pt x="2435165" y="2789704"/>
-                  </a:lnTo>
-                  <a:lnTo>
-                    <a:pt x="2363543" y="2802133"/>
-                  </a:lnTo>
-                  <a:lnTo>
-                    <a:pt x="2291920" y="2814340"/>
-                  </a:lnTo>
-                  <a:lnTo>
-                    <a:pt x="2220298" y="2826329"/>
-                  </a:lnTo>
-                  <a:lnTo>
-                    <a:pt x="2148675" y="2838102"/>
-                  </a:lnTo>
-                  <a:lnTo>
-                    <a:pt x="2077053" y="2849665"/>
-                  </a:lnTo>
-                  <a:lnTo>
-                    <a:pt x="2005430" y="2861021"/>
-                  </a:lnTo>
-                  <a:lnTo>
-                    <a:pt x="1933808" y="2872173"/>
-                  </a:lnTo>
-                  <a:lnTo>
-                    <a:pt x="1862185" y="2883126"/>
-                  </a:lnTo>
-                  <a:lnTo>
-                    <a:pt x="1790563" y="2893882"/>
-                  </a:lnTo>
-                  <a:lnTo>
-                    <a:pt x="1718940" y="2904446"/>
-                  </a:lnTo>
-                  <a:lnTo>
-                    <a:pt x="1647318" y="2914821"/>
-                  </a:lnTo>
-                  <a:lnTo>
-                    <a:pt x="1575695" y="2925010"/>
-                  </a:lnTo>
-                  <a:lnTo>
-                    <a:pt x="1504073" y="2935016"/>
-                  </a:lnTo>
-                  <a:lnTo>
-                    <a:pt x="1432450" y="2944843"/>
-                  </a:lnTo>
-                  <a:lnTo>
-                    <a:pt x="1360827" y="2954495"/>
-                  </a:lnTo>
-                  <a:lnTo>
-                    <a:pt x="1289205" y="2963973"/>
-                  </a:lnTo>
-                  <a:lnTo>
-                    <a:pt x="1217582" y="2973282"/>
-                  </a:lnTo>
-                  <a:lnTo>
-                    <a:pt x="1145960" y="2982424"/>
-                  </a:lnTo>
-                  <a:lnTo>
-                    <a:pt x="1074337" y="2991402"/>
-                  </a:lnTo>
-                  <a:lnTo>
-                    <a:pt x="1002715" y="3000219"/>
-                  </a:lnTo>
-                  <a:lnTo>
-                    <a:pt x="931092" y="3008879"/>
-                  </a:lnTo>
-                  <a:lnTo>
-                    <a:pt x="859470" y="3017383"/>
-                  </a:lnTo>
-                  <a:lnTo>
-                    <a:pt x="787847" y="3025735"/>
-                  </a:lnTo>
-                  <a:lnTo>
-                    <a:pt x="716225" y="3033938"/>
-                  </a:lnTo>
-                  <a:lnTo>
-                    <a:pt x="644602" y="3041993"/>
-                  </a:lnTo>
-                  <a:lnTo>
-                    <a:pt x="572980" y="3049905"/>
-                  </a:lnTo>
-                  <a:lnTo>
-                    <a:pt x="501357" y="3057674"/>
-                  </a:lnTo>
-                  <a:lnTo>
-                    <a:pt x="429735" y="3065305"/>
-                  </a:lnTo>
-                  <a:lnTo>
-                    <a:pt x="358112" y="3072799"/>
-                  </a:lnTo>
-                  <a:lnTo>
-                    <a:pt x="286490" y="3080158"/>
-                  </a:lnTo>
-                  <a:lnTo>
-                    <a:pt x="214867" y="3087386"/>
-                  </a:lnTo>
-                  <a:lnTo>
-                    <a:pt x="143245" y="3094485"/>
-                  </a:lnTo>
-                  <a:lnTo>
-                    <a:pt x="71622" y="3101456"/>
-                  </a:lnTo>
-                  <a:lnTo>
-                    <a:pt x="0" y="3108302"/>
+                    <a:pt x="1432450" y="16024"/>
+                  </a:lnTo>
+                  <a:lnTo>
+                    <a:pt x="1504073" y="217756"/>
+                  </a:lnTo>
+                  <a:lnTo>
+                    <a:pt x="1575695" y="407754"/>
+                  </a:lnTo>
+                  <a:lnTo>
+                    <a:pt x="1647318" y="586698"/>
+                  </a:lnTo>
+                  <a:lnTo>
+                    <a:pt x="1718940" y="755232"/>
+                  </a:lnTo>
+                  <a:lnTo>
+                    <a:pt x="1790563" y="913962"/>
+                  </a:lnTo>
+                  <a:lnTo>
+                    <a:pt x="1862185" y="1063458"/>
+                  </a:lnTo>
+                  <a:lnTo>
+                    <a:pt x="1933808" y="1204257"/>
+                  </a:lnTo>
+                  <a:lnTo>
+                    <a:pt x="2005430" y="1336865"/>
+                  </a:lnTo>
+                  <a:lnTo>
+                    <a:pt x="2077053" y="1461759"/>
+                  </a:lnTo>
+                  <a:lnTo>
+                    <a:pt x="2148675" y="1579387"/>
+                  </a:lnTo>
+                  <a:lnTo>
+                    <a:pt x="2220298" y="1690172"/>
+                  </a:lnTo>
+                  <a:lnTo>
+                    <a:pt x="2291920" y="1794512"/>
+                  </a:lnTo>
+                  <a:lnTo>
+                    <a:pt x="2363543" y="1892782"/>
+                  </a:lnTo>
+                  <a:lnTo>
+                    <a:pt x="2435165" y="1985336"/>
+                  </a:lnTo>
+                  <a:lnTo>
+                    <a:pt x="2506788" y="2072505"/>
+                  </a:lnTo>
+                  <a:lnTo>
+                    <a:pt x="2578410" y="2154603"/>
+                  </a:lnTo>
+                  <a:lnTo>
+                    <a:pt x="2650033" y="2231926"/>
+                  </a:lnTo>
+                  <a:lnTo>
+                    <a:pt x="2721655" y="2304750"/>
+                  </a:lnTo>
+                  <a:lnTo>
+                    <a:pt x="2793278" y="2373337"/>
+                  </a:lnTo>
+                  <a:lnTo>
+                    <a:pt x="2864901" y="2437935"/>
+                  </a:lnTo>
+                  <a:lnTo>
+                    <a:pt x="2936523" y="2498774"/>
+                  </a:lnTo>
+                  <a:lnTo>
+                    <a:pt x="3008146" y="2556074"/>
+                  </a:lnTo>
+                  <a:lnTo>
+                    <a:pt x="3079768" y="2610041"/>
+                  </a:lnTo>
+                  <a:lnTo>
+                    <a:pt x="3151391" y="2652196"/>
+                  </a:lnTo>
+                  <a:lnTo>
+                    <a:pt x="3223013" y="2636340"/>
+                  </a:lnTo>
+                  <a:lnTo>
+                    <a:pt x="3294636" y="2620180"/>
+                  </a:lnTo>
+                  <a:lnTo>
+                    <a:pt x="3366258" y="2603713"/>
+                  </a:lnTo>
+                  <a:lnTo>
+                    <a:pt x="3437881" y="2586931"/>
+                  </a:lnTo>
+                  <a:lnTo>
+                    <a:pt x="3509503" y="2569830"/>
+                  </a:lnTo>
+                  <a:lnTo>
+                    <a:pt x="3581126" y="2552403"/>
+                  </a:lnTo>
+                  <a:lnTo>
+                    <a:pt x="3652748" y="2534643"/>
+                  </a:lnTo>
+                  <a:lnTo>
+                    <a:pt x="3724371" y="2516544"/>
+                  </a:lnTo>
+                  <a:lnTo>
+                    <a:pt x="3795993" y="2498101"/>
+                  </a:lnTo>
+                  <a:lnTo>
+                    <a:pt x="3867616" y="2479305"/>
+                  </a:lnTo>
+                  <a:lnTo>
+                    <a:pt x="3939238" y="2460152"/>
+                  </a:lnTo>
+                  <a:lnTo>
+                    <a:pt x="4010861" y="2440633"/>
+                  </a:lnTo>
+                  <a:lnTo>
+                    <a:pt x="4082483" y="2420741"/>
+                  </a:lnTo>
+                  <a:lnTo>
+                    <a:pt x="4154106" y="2400471"/>
+                  </a:lnTo>
+                  <a:lnTo>
+                    <a:pt x="4225729" y="2379814"/>
+                  </a:lnTo>
+                  <a:lnTo>
+                    <a:pt x="4297351" y="2358763"/>
+                  </a:lnTo>
+                  <a:lnTo>
+                    <a:pt x="4368974" y="2337311"/>
+                  </a:lnTo>
+                  <a:lnTo>
+                    <a:pt x="4440596" y="2315449"/>
+                  </a:lnTo>
+                  <a:lnTo>
+                    <a:pt x="4512219" y="2293171"/>
+                  </a:lnTo>
+                  <a:lnTo>
+                    <a:pt x="4583841" y="2270468"/>
+                  </a:lnTo>
+                  <a:lnTo>
+                    <a:pt x="4655464" y="2247332"/>
+                  </a:lnTo>
+                  <a:lnTo>
+                    <a:pt x="4727086" y="2223754"/>
+                  </a:lnTo>
+                  <a:lnTo>
+                    <a:pt x="4798709" y="2199727"/>
+                  </a:lnTo>
+                  <a:lnTo>
+                    <a:pt x="4870331" y="2175242"/>
+                  </a:lnTo>
+                  <a:lnTo>
+                    <a:pt x="4941954" y="2150290"/>
+                  </a:lnTo>
+                  <a:lnTo>
+                    <a:pt x="5013576" y="2124863"/>
+                  </a:lnTo>
+                  <a:lnTo>
+                    <a:pt x="5085199" y="2098950"/>
+                  </a:lnTo>
+                  <a:lnTo>
+                    <a:pt x="5156821" y="2072543"/>
+                  </a:lnTo>
+                  <a:lnTo>
+                    <a:pt x="5228444" y="2045633"/>
+                  </a:lnTo>
+                  <a:lnTo>
+                    <a:pt x="5300066" y="2018210"/>
+                  </a:lnTo>
+                  <a:lnTo>
+                    <a:pt x="5371689" y="1990263"/>
+                  </a:lnTo>
+                  <a:lnTo>
+                    <a:pt x="5443311" y="1961784"/>
+                  </a:lnTo>
+                  <a:lnTo>
+                    <a:pt x="5514934" y="1932762"/>
+                  </a:lnTo>
+                  <a:lnTo>
+                    <a:pt x="5586557" y="1903186"/>
+                  </a:lnTo>
+                  <a:lnTo>
+                    <a:pt x="5658179" y="1873046"/>
+                  </a:lnTo>
+                  <a:lnTo>
+                    <a:pt x="5729802" y="1842331"/>
+                  </a:lnTo>
+                  <a:lnTo>
+                    <a:pt x="5801424" y="1811031"/>
+                  </a:lnTo>
+                  <a:lnTo>
+                    <a:pt x="5873047" y="1779134"/>
+                  </a:lnTo>
+                  <a:lnTo>
+                    <a:pt x="5944669" y="1746629"/>
+                  </a:lnTo>
+                  <a:lnTo>
+                    <a:pt x="6016292" y="1713504"/>
+                  </a:lnTo>
+                  <a:lnTo>
+                    <a:pt x="6087914" y="1679747"/>
+                  </a:lnTo>
+                  <a:lnTo>
+                    <a:pt x="6159537" y="1645346"/>
+                  </a:lnTo>
+                  <a:lnTo>
+                    <a:pt x="6231159" y="1610290"/>
+                  </a:lnTo>
+                  <a:lnTo>
+                    <a:pt x="6302782" y="1574565"/>
+                  </a:lnTo>
+                  <a:lnTo>
+                    <a:pt x="6374404" y="1538158"/>
+                  </a:lnTo>
+                  <a:lnTo>
+                    <a:pt x="6446027" y="1501058"/>
+                  </a:lnTo>
+                  <a:lnTo>
+                    <a:pt x="6517649" y="1463250"/>
+                  </a:lnTo>
+                  <a:lnTo>
+                    <a:pt x="6589272" y="1424721"/>
+                  </a:lnTo>
+                  <a:lnTo>
+                    <a:pt x="6660894" y="1385457"/>
+                  </a:lnTo>
+                  <a:lnTo>
+                    <a:pt x="6732517" y="1345445"/>
+                  </a:lnTo>
+                  <a:lnTo>
+                    <a:pt x="6804139" y="1304670"/>
+                  </a:lnTo>
+                  <a:lnTo>
+                    <a:pt x="6875762" y="1263117"/>
+                  </a:lnTo>
+                  <a:lnTo>
+                    <a:pt x="6947385" y="1220771"/>
+                  </a:lnTo>
+                  <a:lnTo>
+                    <a:pt x="7019007" y="1177619"/>
+                  </a:lnTo>
+                  <a:lnTo>
+                    <a:pt x="7090630" y="1133643"/>
+                  </a:lnTo>
+                  <a:lnTo>
+                    <a:pt x="7090630" y="3453288"/>
+                  </a:lnTo>
+                  <a:lnTo>
+                    <a:pt x="7019007" y="3451406"/>
+                  </a:lnTo>
+                  <a:lnTo>
+                    <a:pt x="6947385" y="3449409"/>
+                  </a:lnTo>
+                  <a:lnTo>
+                    <a:pt x="6875762" y="3447288"/>
+                  </a:lnTo>
+                  <a:lnTo>
+                    <a:pt x="6804139" y="3445036"/>
+                  </a:lnTo>
+                  <a:lnTo>
+                    <a:pt x="6732517" y="3442645"/>
+                  </a:lnTo>
+                  <a:lnTo>
+                    <a:pt x="6660894" y="3440106"/>
+                  </a:lnTo>
+                  <a:lnTo>
+                    <a:pt x="6589272" y="3437411"/>
+                  </a:lnTo>
+                  <a:lnTo>
+                    <a:pt x="6517649" y="3434548"/>
+                  </a:lnTo>
+                  <a:lnTo>
+                    <a:pt x="6446027" y="3431510"/>
+                  </a:lnTo>
+                  <a:lnTo>
+                    <a:pt x="6374404" y="3428283"/>
+                  </a:lnTo>
+                  <a:lnTo>
+                    <a:pt x="6302782" y="3424857"/>
+                  </a:lnTo>
+                  <a:lnTo>
+                    <a:pt x="6231159" y="3421220"/>
+                  </a:lnTo>
+                  <a:lnTo>
+                    <a:pt x="6159537" y="3417358"/>
+                  </a:lnTo>
+                  <a:lnTo>
+                    <a:pt x="6087914" y="3413257"/>
+                  </a:lnTo>
+                  <a:lnTo>
+                    <a:pt x="6016292" y="3408903"/>
+                  </a:lnTo>
+                  <a:lnTo>
+                    <a:pt x="5944669" y="3404280"/>
+                  </a:lnTo>
+                  <a:lnTo>
+                    <a:pt x="5873047" y="3399372"/>
+                  </a:lnTo>
+                  <a:lnTo>
+                    <a:pt x="5801424" y="3394160"/>
+                  </a:lnTo>
+                  <a:lnTo>
+                    <a:pt x="5729802" y="3388626"/>
+                  </a:lnTo>
+                  <a:lnTo>
+                    <a:pt x="5658179" y="3382751"/>
+                  </a:lnTo>
+                  <a:lnTo>
+                    <a:pt x="5586557" y="3376513"/>
+                  </a:lnTo>
+                  <a:lnTo>
+                    <a:pt x="5514934" y="3369889"/>
+                  </a:lnTo>
+                  <a:lnTo>
+                    <a:pt x="5443311" y="3362856"/>
+                  </a:lnTo>
+                  <a:lnTo>
+                    <a:pt x="5371689" y="3355389"/>
+                  </a:lnTo>
+                  <a:lnTo>
+                    <a:pt x="5300066" y="3347461"/>
+                  </a:lnTo>
+                  <a:lnTo>
+                    <a:pt x="5228444" y="3339043"/>
+                  </a:lnTo>
+                  <a:lnTo>
+                    <a:pt x="5156821" y="3330105"/>
+                  </a:lnTo>
+                  <a:lnTo>
+                    <a:pt x="5085199" y="3320615"/>
+                  </a:lnTo>
+                  <a:lnTo>
+                    <a:pt x="5013576" y="3310539"/>
+                  </a:lnTo>
+                  <a:lnTo>
+                    <a:pt x="4941954" y="3299840"/>
+                  </a:lnTo>
+                  <a:lnTo>
+                    <a:pt x="4870331" y="3288481"/>
+                  </a:lnTo>
+                  <a:lnTo>
+                    <a:pt x="4798709" y="3276419"/>
+                  </a:lnTo>
+                  <a:lnTo>
+                    <a:pt x="4727086" y="3263613"/>
+                  </a:lnTo>
+                  <a:lnTo>
+                    <a:pt x="4655464" y="3250016"/>
+                  </a:lnTo>
+                  <a:lnTo>
+                    <a:pt x="4583841" y="3235579"/>
+                  </a:lnTo>
+                  <a:lnTo>
+                    <a:pt x="4512219" y="3220250"/>
+                  </a:lnTo>
+                  <a:lnTo>
+                    <a:pt x="4440596" y="3203975"/>
+                  </a:lnTo>
+                  <a:lnTo>
+                    <a:pt x="4368974" y="3186694"/>
+                  </a:lnTo>
+                  <a:lnTo>
+                    <a:pt x="4297351" y="3168346"/>
+                  </a:lnTo>
+                  <a:lnTo>
+                    <a:pt x="4225729" y="3148864"/>
+                  </a:lnTo>
+                  <a:lnTo>
+                    <a:pt x="4154106" y="3128179"/>
+                  </a:lnTo>
+                  <a:lnTo>
+                    <a:pt x="4082483" y="3106216"/>
+                  </a:lnTo>
+                  <a:lnTo>
+                    <a:pt x="4010861" y="3082897"/>
+                  </a:lnTo>
+                  <a:lnTo>
+                    <a:pt x="3939238" y="3058138"/>
+                  </a:lnTo>
+                  <a:lnTo>
+                    <a:pt x="3867616" y="3031849"/>
+                  </a:lnTo>
+                  <a:lnTo>
+                    <a:pt x="3795993" y="3003936"/>
+                  </a:lnTo>
+                  <a:lnTo>
+                    <a:pt x="3724371" y="2974299"/>
+                  </a:lnTo>
+                  <a:lnTo>
+                    <a:pt x="3652748" y="2942832"/>
+                  </a:lnTo>
+                  <a:lnTo>
+                    <a:pt x="3581126" y="2909421"/>
+                  </a:lnTo>
+                  <a:lnTo>
+                    <a:pt x="3509503" y="2873946"/>
+                  </a:lnTo>
+                  <a:lnTo>
+                    <a:pt x="3437881" y="2836280"/>
+                  </a:lnTo>
+                  <a:lnTo>
+                    <a:pt x="3366258" y="2796287"/>
+                  </a:lnTo>
+                  <a:lnTo>
+                    <a:pt x="3294636" y="2753825"/>
+                  </a:lnTo>
+                  <a:lnTo>
+                    <a:pt x="3223013" y="2708739"/>
+                  </a:lnTo>
+                  <a:lnTo>
+                    <a:pt x="3151391" y="2660868"/>
+                  </a:lnTo>
+                  <a:lnTo>
+                    <a:pt x="3079768" y="2667757"/>
+                  </a:lnTo>
+                  <a:lnTo>
+                    <a:pt x="3008146" y="2683026"/>
+                  </a:lnTo>
+                  <a:lnTo>
+                    <a:pt x="2936523" y="2698009"/>
+                  </a:lnTo>
+                  <a:lnTo>
+                    <a:pt x="2864901" y="2712712"/>
+                  </a:lnTo>
+                  <a:lnTo>
+                    <a:pt x="2793278" y="2727139"/>
+                  </a:lnTo>
+                  <a:lnTo>
+                    <a:pt x="2721655" y="2741297"/>
+                  </a:lnTo>
+                  <a:lnTo>
+                    <a:pt x="2650033" y="2755190"/>
+                  </a:lnTo>
+                  <a:lnTo>
+                    <a:pt x="2578410" y="2768823"/>
+                  </a:lnTo>
+                  <a:lnTo>
+                    <a:pt x="2506788" y="2782201"/>
+                  </a:lnTo>
+                  <a:lnTo>
+                    <a:pt x="2435165" y="2795328"/>
+                  </a:lnTo>
+                  <a:lnTo>
+                    <a:pt x="2363543" y="2808210"/>
+                  </a:lnTo>
+                  <a:lnTo>
+                    <a:pt x="2291920" y="2820851"/>
+                  </a:lnTo>
+                  <a:lnTo>
+                    <a:pt x="2220298" y="2833255"/>
+                  </a:lnTo>
+                  <a:lnTo>
+                    <a:pt x="2148675" y="2845427"/>
+                  </a:lnTo>
+                  <a:lnTo>
+                    <a:pt x="2077053" y="2857372"/>
+                  </a:lnTo>
+                  <a:lnTo>
+                    <a:pt x="2005430" y="2869093"/>
+                  </a:lnTo>
+                  <a:lnTo>
+                    <a:pt x="1933808" y="2880594"/>
+                  </a:lnTo>
+                  <a:lnTo>
+                    <a:pt x="1862185" y="2891880"/>
+                  </a:lnTo>
+                  <a:lnTo>
+                    <a:pt x="1790563" y="2902956"/>
+                  </a:lnTo>
+                  <a:lnTo>
+                    <a:pt x="1718940" y="2913823"/>
+                  </a:lnTo>
+                  <a:lnTo>
+                    <a:pt x="1647318" y="2924488"/>
+                  </a:lnTo>
+                  <a:lnTo>
+                    <a:pt x="1575695" y="2934953"/>
+                  </a:lnTo>
+                  <a:lnTo>
+                    <a:pt x="1504073" y="2945222"/>
+                  </a:lnTo>
+                  <a:lnTo>
+                    <a:pt x="1432450" y="2955299"/>
+                  </a:lnTo>
+                  <a:lnTo>
+                    <a:pt x="1360827" y="2965188"/>
+                  </a:lnTo>
+                  <a:lnTo>
+                    <a:pt x="1289205" y="2974891"/>
+                  </a:lnTo>
+                  <a:lnTo>
+                    <a:pt x="1217582" y="2984413"/>
+                  </a:lnTo>
+                  <a:lnTo>
+                    <a:pt x="1145960" y="2993756"/>
+                  </a:lnTo>
+                  <a:lnTo>
+                    <a:pt x="1074337" y="3002925"/>
+                  </a:lnTo>
+                  <a:lnTo>
+                    <a:pt x="1002715" y="3011922"/>
+                  </a:lnTo>
+                  <a:lnTo>
+                    <a:pt x="931092" y="3020751"/>
+                  </a:lnTo>
+                  <a:lnTo>
+                    <a:pt x="859470" y="3029415"/>
+                  </a:lnTo>
+                  <a:lnTo>
+                    <a:pt x="787847" y="3037916"/>
+                  </a:lnTo>
+                  <a:lnTo>
+                    <a:pt x="716225" y="3046259"/>
+                  </a:lnTo>
+                  <a:lnTo>
+                    <a:pt x="644602" y="3054445"/>
+                  </a:lnTo>
+                  <a:lnTo>
+                    <a:pt x="572980" y="3062479"/>
+                  </a:lnTo>
+                  <a:lnTo>
+                    <a:pt x="501357" y="3070361"/>
+                  </a:lnTo>
+                  <a:lnTo>
+                    <a:pt x="429735" y="3078097"/>
+                  </a:lnTo>
+                  <a:lnTo>
+                    <a:pt x="358112" y="3085687"/>
+                  </a:lnTo>
+                  <a:lnTo>
+                    <a:pt x="286490" y="3093136"/>
+                  </a:lnTo>
+                  <a:lnTo>
+                    <a:pt x="214867" y="3100445"/>
+                  </a:lnTo>
+                  <a:lnTo>
+                    <a:pt x="143245" y="3107618"/>
+                  </a:lnTo>
+                  <a:lnTo>
+                    <a:pt x="71622" y="3114656"/>
+                  </a:lnTo>
+                  <a:lnTo>
+                    <a:pt x="0" y="3121562"/>
                   </a:lnTo>
                   <a:close/>
                 </a:path>
@@ -3960,252 +3963,255 @@
           </p:nvSpPr>
           <p:spPr>
             <a:xfrm>
-              <a:off x="2628026" y="2073503"/>
-              <a:ext cx="5634653" cy="2652234"/>
+              <a:off x="2599141" y="2073503"/>
+              <a:ext cx="5663537" cy="2652196"/>
             </a:xfrm>
             <a:custGeom>
               <a:avLst/>
               <a:pathLst>
-                <a:path w="5634653" h="2652234">
+                <a:path w="5663537" h="2652196">
                   <a:moveTo>
                     <a:pt x="0" y="0"/>
                   </a:moveTo>
                   <a:lnTo>
-                    <a:pt x="48096" y="141090"/>
-                  </a:lnTo>
-                  <a:lnTo>
-                    <a:pt x="119718" y="338770"/>
-                  </a:lnTo>
-                  <a:lnTo>
-                    <a:pt x="191341" y="524759"/>
-                  </a:lnTo>
-                  <a:lnTo>
-                    <a:pt x="262963" y="699749"/>
-                  </a:lnTo>
-                  <a:lnTo>
-                    <a:pt x="334586" y="864391"/>
-                  </a:lnTo>
-                  <a:lnTo>
-                    <a:pt x="406208" y="1019295"/>
-                  </a:lnTo>
-                  <a:lnTo>
-                    <a:pt x="477831" y="1165039"/>
-                  </a:lnTo>
-                  <a:lnTo>
-                    <a:pt x="549453" y="1302164"/>
-                  </a:lnTo>
-                  <a:lnTo>
-                    <a:pt x="621076" y="1431180"/>
-                  </a:lnTo>
-                  <a:lnTo>
-                    <a:pt x="692699" y="1552565"/>
-                  </a:lnTo>
-                  <a:lnTo>
-                    <a:pt x="764321" y="1666772"/>
-                  </a:lnTo>
-                  <a:lnTo>
-                    <a:pt x="835944" y="1774226"/>
-                  </a:lnTo>
-                  <a:lnTo>
-                    <a:pt x="907566" y="1875324"/>
-                  </a:lnTo>
-                  <a:lnTo>
-                    <a:pt x="979189" y="1970444"/>
-                  </a:lnTo>
-                  <a:lnTo>
-                    <a:pt x="1050811" y="2059938"/>
-                  </a:lnTo>
-                  <a:lnTo>
-                    <a:pt x="1122434" y="2144140"/>
-                  </a:lnTo>
-                  <a:lnTo>
-                    <a:pt x="1194056" y="2223362"/>
-                  </a:lnTo>
-                  <a:lnTo>
-                    <a:pt x="1265679" y="2297900"/>
-                  </a:lnTo>
-                  <a:lnTo>
-                    <a:pt x="1337301" y="2368029"/>
-                  </a:lnTo>
-                  <a:lnTo>
-                    <a:pt x="1408924" y="2434011"/>
-                  </a:lnTo>
-                  <a:lnTo>
-                    <a:pt x="1480546" y="2496090"/>
-                  </a:lnTo>
-                  <a:lnTo>
-                    <a:pt x="1552169" y="2554499"/>
-                  </a:lnTo>
-                  <a:lnTo>
-                    <a:pt x="1623791" y="2609453"/>
-                  </a:lnTo>
-                  <a:lnTo>
-                    <a:pt x="1695414" y="2652234"/>
-                  </a:lnTo>
-                  <a:lnTo>
-                    <a:pt x="1767036" y="2637071"/>
-                  </a:lnTo>
-                  <a:lnTo>
-                    <a:pt x="1838659" y="2621631"/>
-                  </a:lnTo>
-                  <a:lnTo>
-                    <a:pt x="1910281" y="2605910"/>
-                  </a:lnTo>
-                  <a:lnTo>
-                    <a:pt x="1981904" y="2589902"/>
-                  </a:lnTo>
-                  <a:lnTo>
-                    <a:pt x="2053527" y="2573602"/>
-                  </a:lnTo>
-                  <a:lnTo>
-                    <a:pt x="2125149" y="2557005"/>
-                  </a:lnTo>
-                  <a:lnTo>
-                    <a:pt x="2196772" y="2540106"/>
-                  </a:lnTo>
-                  <a:lnTo>
-                    <a:pt x="2268394" y="2522898"/>
-                  </a:lnTo>
-                  <a:lnTo>
-                    <a:pt x="2340017" y="2505376"/>
-                  </a:lnTo>
-                  <a:lnTo>
-                    <a:pt x="2411639" y="2487535"/>
-                  </a:lnTo>
-                  <a:lnTo>
-                    <a:pt x="2483262" y="2469369"/>
-                  </a:lnTo>
-                  <a:lnTo>
-                    <a:pt x="2554884" y="2450871"/>
-                  </a:lnTo>
-                  <a:lnTo>
-                    <a:pt x="2626507" y="2432036"/>
-                  </a:lnTo>
-                  <a:lnTo>
-                    <a:pt x="2698129" y="2412857"/>
-                  </a:lnTo>
-                  <a:lnTo>
-                    <a:pt x="2769752" y="2393329"/>
-                  </a:lnTo>
-                  <a:lnTo>
-                    <a:pt x="2841374" y="2373445"/>
-                  </a:lnTo>
-                  <a:lnTo>
-                    <a:pt x="2912997" y="2353198"/>
-                  </a:lnTo>
-                  <a:lnTo>
-                    <a:pt x="2984619" y="2332582"/>
-                  </a:lnTo>
-                  <a:lnTo>
-                    <a:pt x="3056242" y="2311589"/>
-                  </a:lnTo>
-                  <a:lnTo>
-                    <a:pt x="3127864" y="2290215"/>
-                  </a:lnTo>
-                  <a:lnTo>
-                    <a:pt x="3199487" y="2268450"/>
-                  </a:lnTo>
-                  <a:lnTo>
-                    <a:pt x="3271109" y="2246288"/>
-                  </a:lnTo>
-                  <a:lnTo>
-                    <a:pt x="3342732" y="2223722"/>
-                  </a:lnTo>
-                  <a:lnTo>
-                    <a:pt x="3414355" y="2200745"/>
-                  </a:lnTo>
-                  <a:lnTo>
-                    <a:pt x="3485977" y="2177349"/>
-                  </a:lnTo>
-                  <a:lnTo>
-                    <a:pt x="3557600" y="2153526"/>
-                  </a:lnTo>
-                  <a:lnTo>
-                    <a:pt x="3629222" y="2129269"/>
-                  </a:lnTo>
-                  <a:lnTo>
-                    <a:pt x="3700845" y="2104569"/>
-                  </a:lnTo>
-                  <a:lnTo>
-                    <a:pt x="3772467" y="2079419"/>
-                  </a:lnTo>
-                  <a:lnTo>
-                    <a:pt x="3844090" y="2053810"/>
-                  </a:lnTo>
-                  <a:lnTo>
-                    <a:pt x="3915712" y="2027735"/>
-                  </a:lnTo>
-                  <a:lnTo>
-                    <a:pt x="3987335" y="2001183"/>
-                  </a:lnTo>
-                  <a:lnTo>
-                    <a:pt x="4058957" y="1974148"/>
-                  </a:lnTo>
-                  <a:lnTo>
-                    <a:pt x="4130580" y="1946620"/>
-                  </a:lnTo>
-                  <a:lnTo>
-                    <a:pt x="4202202" y="1918589"/>
-                  </a:lnTo>
-                  <a:lnTo>
-                    <a:pt x="4273825" y="1890048"/>
-                  </a:lnTo>
-                  <a:lnTo>
-                    <a:pt x="4345447" y="1860986"/>
-                  </a:lnTo>
-                  <a:lnTo>
-                    <a:pt x="4417070" y="1831394"/>
-                  </a:lnTo>
-                  <a:lnTo>
-                    <a:pt x="4488692" y="1801262"/>
-                  </a:lnTo>
-                  <a:lnTo>
-                    <a:pt x="4560315" y="1770581"/>
-                  </a:lnTo>
-                  <a:lnTo>
-                    <a:pt x="4631937" y="1739341"/>
-                  </a:lnTo>
-                  <a:lnTo>
-                    <a:pt x="4703560" y="1707530"/>
-                  </a:lnTo>
-                  <a:lnTo>
-                    <a:pt x="4775183" y="1675140"/>
-                  </a:lnTo>
-                  <a:lnTo>
-                    <a:pt x="4846805" y="1642159"/>
-                  </a:lnTo>
-                  <a:lnTo>
-                    <a:pt x="4918428" y="1608577"/>
-                  </a:lnTo>
-                  <a:lnTo>
-                    <a:pt x="4990050" y="1574382"/>
-                  </a:lnTo>
-                  <a:lnTo>
-                    <a:pt x="5061673" y="1539564"/>
-                  </a:lnTo>
-                  <a:lnTo>
-                    <a:pt x="5133295" y="1504111"/>
-                  </a:lnTo>
-                  <a:lnTo>
-                    <a:pt x="5204918" y="1468011"/>
-                  </a:lnTo>
-                  <a:lnTo>
-                    <a:pt x="5276540" y="1431253"/>
-                  </a:lnTo>
-                  <a:lnTo>
-                    <a:pt x="5348163" y="1393824"/>
-                  </a:lnTo>
-                  <a:lnTo>
-                    <a:pt x="5419785" y="1355713"/>
-                  </a:lnTo>
-                  <a:lnTo>
-                    <a:pt x="5491408" y="1316908"/>
-                  </a:lnTo>
-                  <a:lnTo>
-                    <a:pt x="5563030" y="1277394"/>
-                  </a:lnTo>
-                  <a:lnTo>
-                    <a:pt x="5634653" y="1237160"/>
+                    <a:pt x="5358" y="16024"/>
+                  </a:lnTo>
+                  <a:lnTo>
+                    <a:pt x="76980" y="217756"/>
+                  </a:lnTo>
+                  <a:lnTo>
+                    <a:pt x="148603" y="407754"/>
+                  </a:lnTo>
+                  <a:lnTo>
+                    <a:pt x="220225" y="586698"/>
+                  </a:lnTo>
+                  <a:lnTo>
+                    <a:pt x="291848" y="755232"/>
+                  </a:lnTo>
+                  <a:lnTo>
+                    <a:pt x="363470" y="913962"/>
+                  </a:lnTo>
+                  <a:lnTo>
+                    <a:pt x="435093" y="1063458"/>
+                  </a:lnTo>
+                  <a:lnTo>
+                    <a:pt x="506715" y="1204257"/>
+                  </a:lnTo>
+                  <a:lnTo>
+                    <a:pt x="578338" y="1336865"/>
+                  </a:lnTo>
+                  <a:lnTo>
+                    <a:pt x="649960" y="1461759"/>
+                  </a:lnTo>
+                  <a:lnTo>
+                    <a:pt x="721583" y="1579387"/>
+                  </a:lnTo>
+                  <a:lnTo>
+                    <a:pt x="793205" y="1690172"/>
+                  </a:lnTo>
+                  <a:lnTo>
+                    <a:pt x="864828" y="1794512"/>
+                  </a:lnTo>
+                  <a:lnTo>
+                    <a:pt x="936450" y="1892782"/>
+                  </a:lnTo>
+                  <a:lnTo>
+                    <a:pt x="1008073" y="1985336"/>
+                  </a:lnTo>
+                  <a:lnTo>
+                    <a:pt x="1079696" y="2072505"/>
+                  </a:lnTo>
+                  <a:lnTo>
+                    <a:pt x="1151318" y="2154603"/>
+                  </a:lnTo>
+                  <a:lnTo>
+                    <a:pt x="1222941" y="2231926"/>
+                  </a:lnTo>
+                  <a:lnTo>
+                    <a:pt x="1294563" y="2304750"/>
+                  </a:lnTo>
+                  <a:lnTo>
+                    <a:pt x="1366186" y="2373337"/>
+                  </a:lnTo>
+                  <a:lnTo>
+                    <a:pt x="1437808" y="2437935"/>
+                  </a:lnTo>
+                  <a:lnTo>
+                    <a:pt x="1509431" y="2498774"/>
+                  </a:lnTo>
+                  <a:lnTo>
+                    <a:pt x="1581053" y="2556074"/>
+                  </a:lnTo>
+                  <a:lnTo>
+                    <a:pt x="1652676" y="2610041"/>
+                  </a:lnTo>
+                  <a:lnTo>
+                    <a:pt x="1724298" y="2652196"/>
+                  </a:lnTo>
+                  <a:lnTo>
+                    <a:pt x="1795921" y="2636340"/>
+                  </a:lnTo>
+                  <a:lnTo>
+                    <a:pt x="1867543" y="2620180"/>
+                  </a:lnTo>
+                  <a:lnTo>
+                    <a:pt x="1939166" y="2603713"/>
+                  </a:lnTo>
+                  <a:lnTo>
+                    <a:pt x="2010788" y="2586931"/>
+                  </a:lnTo>
+                  <a:lnTo>
+                    <a:pt x="2082411" y="2569830"/>
+                  </a:lnTo>
+                  <a:lnTo>
+                    <a:pt x="2154033" y="2552403"/>
+                  </a:lnTo>
+                  <a:lnTo>
+                    <a:pt x="2225656" y="2534643"/>
+                  </a:lnTo>
+                  <a:lnTo>
+                    <a:pt x="2297278" y="2516544"/>
+                  </a:lnTo>
+                  <a:lnTo>
+                    <a:pt x="2368901" y="2498101"/>
+                  </a:lnTo>
+                  <a:lnTo>
+                    <a:pt x="2440524" y="2479305"/>
+                  </a:lnTo>
+                  <a:lnTo>
+                    <a:pt x="2512146" y="2460152"/>
+                  </a:lnTo>
+                  <a:lnTo>
+                    <a:pt x="2583769" y="2440633"/>
+                  </a:lnTo>
+                  <a:lnTo>
+                    <a:pt x="2655391" y="2420741"/>
+                  </a:lnTo>
+                  <a:lnTo>
+                    <a:pt x="2727014" y="2400471"/>
+                  </a:lnTo>
+                  <a:lnTo>
+                    <a:pt x="2798636" y="2379814"/>
+                  </a:lnTo>
+                  <a:lnTo>
+                    <a:pt x="2870259" y="2358763"/>
+                  </a:lnTo>
+                  <a:lnTo>
+                    <a:pt x="2941881" y="2337311"/>
+                  </a:lnTo>
+                  <a:lnTo>
+                    <a:pt x="3013504" y="2315449"/>
+                  </a:lnTo>
+                  <a:lnTo>
+                    <a:pt x="3085126" y="2293171"/>
+                  </a:lnTo>
+                  <a:lnTo>
+                    <a:pt x="3156749" y="2270468"/>
+                  </a:lnTo>
+                  <a:lnTo>
+                    <a:pt x="3228371" y="2247332"/>
+                  </a:lnTo>
+                  <a:lnTo>
+                    <a:pt x="3299994" y="2223754"/>
+                  </a:lnTo>
+                  <a:lnTo>
+                    <a:pt x="3371616" y="2199727"/>
+                  </a:lnTo>
+                  <a:lnTo>
+                    <a:pt x="3443239" y="2175242"/>
+                  </a:lnTo>
+                  <a:lnTo>
+                    <a:pt x="3514861" y="2150290"/>
+                  </a:lnTo>
+                  <a:lnTo>
+                    <a:pt x="3586484" y="2124863"/>
+                  </a:lnTo>
+                  <a:lnTo>
+                    <a:pt x="3658106" y="2098950"/>
+                  </a:lnTo>
+                  <a:lnTo>
+                    <a:pt x="3729729" y="2072543"/>
+                  </a:lnTo>
+                  <a:lnTo>
+                    <a:pt x="3801352" y="2045633"/>
+                  </a:lnTo>
+                  <a:lnTo>
+                    <a:pt x="3872974" y="2018210"/>
+                  </a:lnTo>
+                  <a:lnTo>
+                    <a:pt x="3944597" y="1990263"/>
+                  </a:lnTo>
+                  <a:lnTo>
+                    <a:pt x="4016219" y="1961784"/>
+                  </a:lnTo>
+                  <a:lnTo>
+                    <a:pt x="4087842" y="1932762"/>
+                  </a:lnTo>
+                  <a:lnTo>
+                    <a:pt x="4159464" y="1903186"/>
+                  </a:lnTo>
+                  <a:lnTo>
+                    <a:pt x="4231087" y="1873046"/>
+                  </a:lnTo>
+                  <a:lnTo>
+                    <a:pt x="4302709" y="1842331"/>
+                  </a:lnTo>
+                  <a:lnTo>
+                    <a:pt x="4374332" y="1811031"/>
+                  </a:lnTo>
+                  <a:lnTo>
+                    <a:pt x="4445954" y="1779134"/>
+                  </a:lnTo>
+                  <a:lnTo>
+                    <a:pt x="4517577" y="1746629"/>
+                  </a:lnTo>
+                  <a:lnTo>
+                    <a:pt x="4589199" y="1713504"/>
+                  </a:lnTo>
+                  <a:lnTo>
+                    <a:pt x="4660822" y="1679747"/>
+                  </a:lnTo>
+                  <a:lnTo>
+                    <a:pt x="4732444" y="1645346"/>
+                  </a:lnTo>
+                  <a:lnTo>
+                    <a:pt x="4804067" y="1610290"/>
+                  </a:lnTo>
+                  <a:lnTo>
+                    <a:pt x="4875689" y="1574565"/>
+                  </a:lnTo>
+                  <a:lnTo>
+                    <a:pt x="4947312" y="1538158"/>
+                  </a:lnTo>
+                  <a:lnTo>
+                    <a:pt x="5018934" y="1501058"/>
+                  </a:lnTo>
+                  <a:lnTo>
+                    <a:pt x="5090557" y="1463250"/>
+                  </a:lnTo>
+                  <a:lnTo>
+                    <a:pt x="5162180" y="1424721"/>
+                  </a:lnTo>
+                  <a:lnTo>
+                    <a:pt x="5233802" y="1385457"/>
+                  </a:lnTo>
+                  <a:lnTo>
+                    <a:pt x="5305425" y="1345445"/>
+                  </a:lnTo>
+                  <a:lnTo>
+                    <a:pt x="5377047" y="1304670"/>
+                  </a:lnTo>
+                  <a:lnTo>
+                    <a:pt x="5448670" y="1263117"/>
+                  </a:lnTo>
+                  <a:lnTo>
+                    <a:pt x="5520292" y="1220771"/>
+                  </a:lnTo>
+                  <a:lnTo>
+                    <a:pt x="5591915" y="1177619"/>
+                  </a:lnTo>
+                  <a:lnTo>
+                    <a:pt x="5663537" y="1133643"/>
                   </a:lnTo>
                 </a:path>
               </a:pathLst>
@@ -4225,312 +4231,312 @@
           </p:nvSpPr>
           <p:spPr>
             <a:xfrm>
-              <a:off x="1172049" y="4734661"/>
-              <a:ext cx="7090630" cy="793808"/>
+              <a:off x="1172049" y="4734372"/>
+              <a:ext cx="7090630" cy="792419"/>
             </a:xfrm>
             <a:custGeom>
               <a:avLst/>
               <a:pathLst>
-                <a:path w="7090630" h="793808">
+                <a:path w="7090630" h="792419">
                   <a:moveTo>
-                    <a:pt x="7090630" y="793808"/>
+                    <a:pt x="7090630" y="792419"/>
                   </a:moveTo>
                   <a:lnTo>
-                    <a:pt x="7019007" y="791999"/>
-                  </a:lnTo>
-                  <a:lnTo>
-                    <a:pt x="6947385" y="790076"/>
-                  </a:lnTo>
-                  <a:lnTo>
-                    <a:pt x="6875762" y="788033"/>
-                  </a:lnTo>
-                  <a:lnTo>
-                    <a:pt x="6804139" y="785861"/>
-                  </a:lnTo>
-                  <a:lnTo>
-                    <a:pt x="6732517" y="783552"/>
-                  </a:lnTo>
-                  <a:lnTo>
-                    <a:pt x="6660894" y="781098"/>
-                  </a:lnTo>
-                  <a:lnTo>
-                    <a:pt x="6589272" y="778491"/>
-                  </a:lnTo>
-                  <a:lnTo>
-                    <a:pt x="6517649" y="775719"/>
-                  </a:lnTo>
-                  <a:lnTo>
-                    <a:pt x="6446027" y="772773"/>
-                  </a:lnTo>
-                  <a:lnTo>
-                    <a:pt x="6374404" y="769642"/>
-                  </a:lnTo>
-                  <a:lnTo>
-                    <a:pt x="6302782" y="766314"/>
-                  </a:lnTo>
-                  <a:lnTo>
-                    <a:pt x="6231159" y="762776"/>
-                  </a:lnTo>
-                  <a:lnTo>
-                    <a:pt x="6159537" y="759017"/>
-                  </a:lnTo>
-                  <a:lnTo>
-                    <a:pt x="6087914" y="755021"/>
-                  </a:lnTo>
-                  <a:lnTo>
-                    <a:pt x="6016292" y="750774"/>
-                  </a:lnTo>
-                  <a:lnTo>
-                    <a:pt x="5944669" y="746260"/>
-                  </a:lnTo>
-                  <a:lnTo>
-                    <a:pt x="5873047" y="741462"/>
-                  </a:lnTo>
-                  <a:lnTo>
-                    <a:pt x="5801424" y="736363"/>
-                  </a:lnTo>
-                  <a:lnTo>
-                    <a:pt x="5729802" y="730943"/>
-                  </a:lnTo>
-                  <a:lnTo>
-                    <a:pt x="5658179" y="725183"/>
-                  </a:lnTo>
-                  <a:lnTo>
-                    <a:pt x="5586557" y="719061"/>
-                  </a:lnTo>
-                  <a:lnTo>
-                    <a:pt x="5514934" y="712553"/>
-                  </a:lnTo>
-                  <a:lnTo>
-                    <a:pt x="5443311" y="705637"/>
-                  </a:lnTo>
-                  <a:lnTo>
-                    <a:pt x="5371689" y="698286"/>
-                  </a:lnTo>
-                  <a:lnTo>
-                    <a:pt x="5300066" y="690473"/>
-                  </a:lnTo>
-                  <a:lnTo>
-                    <a:pt x="5228444" y="682169"/>
-                  </a:lnTo>
-                  <a:lnTo>
-                    <a:pt x="5156821" y="673342"/>
-                  </a:lnTo>
-                  <a:lnTo>
-                    <a:pt x="5085199" y="663961"/>
-                  </a:lnTo>
-                  <a:lnTo>
-                    <a:pt x="5013576" y="653991"/>
-                  </a:lnTo>
-                  <a:lnTo>
-                    <a:pt x="4941954" y="643394"/>
-                  </a:lnTo>
-                  <a:lnTo>
-                    <a:pt x="4870331" y="632130"/>
-                  </a:lnTo>
-                  <a:lnTo>
-                    <a:pt x="4798709" y="620159"/>
-                  </a:lnTo>
-                  <a:lnTo>
-                    <a:pt x="4727086" y="607435"/>
-                  </a:lnTo>
-                  <a:lnTo>
-                    <a:pt x="4655464" y="593911"/>
-                  </a:lnTo>
-                  <a:lnTo>
-                    <a:pt x="4583841" y="579538"/>
-                  </a:lnTo>
-                  <a:lnTo>
-                    <a:pt x="4512219" y="564261"/>
-                  </a:lnTo>
-                  <a:lnTo>
-                    <a:pt x="4440596" y="548023"/>
-                  </a:lnTo>
-                  <a:lnTo>
-                    <a:pt x="4368974" y="530765"/>
-                  </a:lnTo>
-                  <a:lnTo>
-                    <a:pt x="4297351" y="512422"/>
-                  </a:lnTo>
-                  <a:lnTo>
-                    <a:pt x="4225729" y="492927"/>
-                  </a:lnTo>
-                  <a:lnTo>
-                    <a:pt x="4154106" y="472206"/>
-                  </a:lnTo>
-                  <a:lnTo>
-                    <a:pt x="4082483" y="450182"/>
-                  </a:lnTo>
-                  <a:lnTo>
-                    <a:pt x="4010861" y="426774"/>
-                  </a:lnTo>
-                  <a:lnTo>
-                    <a:pt x="3939238" y="401895"/>
-                  </a:lnTo>
-                  <a:lnTo>
-                    <a:pt x="3867616" y="375452"/>
-                  </a:lnTo>
-                  <a:lnTo>
-                    <a:pt x="3795993" y="347347"/>
-                  </a:lnTo>
-                  <a:lnTo>
-                    <a:pt x="3724371" y="317475"/>
-                  </a:lnTo>
-                  <a:lnTo>
-                    <a:pt x="3652748" y="285726"/>
-                  </a:lnTo>
-                  <a:lnTo>
-                    <a:pt x="3581126" y="251981"/>
-                  </a:lnTo>
-                  <a:lnTo>
-                    <a:pt x="3509503" y="216116"/>
-                  </a:lnTo>
-                  <a:lnTo>
-                    <a:pt x="3437881" y="177995"/>
-                  </a:lnTo>
-                  <a:lnTo>
-                    <a:pt x="3366258" y="137479"/>
-                  </a:lnTo>
-                  <a:lnTo>
-                    <a:pt x="3294636" y="94416"/>
-                  </a:lnTo>
-                  <a:lnTo>
-                    <a:pt x="3223013" y="48646"/>
+                    <a:pt x="7019007" y="790537"/>
+                  </a:lnTo>
+                  <a:lnTo>
+                    <a:pt x="6947385" y="788540"/>
+                  </a:lnTo>
+                  <a:lnTo>
+                    <a:pt x="6875762" y="786419"/>
+                  </a:lnTo>
+                  <a:lnTo>
+                    <a:pt x="6804139" y="784167"/>
+                  </a:lnTo>
+                  <a:lnTo>
+                    <a:pt x="6732517" y="781776"/>
+                  </a:lnTo>
+                  <a:lnTo>
+                    <a:pt x="6660894" y="779237"/>
+                  </a:lnTo>
+                  <a:lnTo>
+                    <a:pt x="6589272" y="776542"/>
+                  </a:lnTo>
+                  <a:lnTo>
+                    <a:pt x="6517649" y="773679"/>
+                  </a:lnTo>
+                  <a:lnTo>
+                    <a:pt x="6446027" y="770641"/>
+                  </a:lnTo>
+                  <a:lnTo>
+                    <a:pt x="6374404" y="767414"/>
+                  </a:lnTo>
+                  <a:lnTo>
+                    <a:pt x="6302782" y="763988"/>
+                  </a:lnTo>
+                  <a:lnTo>
+                    <a:pt x="6231159" y="760351"/>
+                  </a:lnTo>
+                  <a:lnTo>
+                    <a:pt x="6159537" y="756489"/>
+                  </a:lnTo>
+                  <a:lnTo>
+                    <a:pt x="6087914" y="752388"/>
+                  </a:lnTo>
+                  <a:lnTo>
+                    <a:pt x="6016292" y="748034"/>
+                  </a:lnTo>
+                  <a:lnTo>
+                    <a:pt x="5944669" y="743411"/>
+                  </a:lnTo>
+                  <a:lnTo>
+                    <a:pt x="5873047" y="738503"/>
+                  </a:lnTo>
+                  <a:lnTo>
+                    <a:pt x="5801424" y="733291"/>
+                  </a:lnTo>
+                  <a:lnTo>
+                    <a:pt x="5729802" y="727757"/>
+                  </a:lnTo>
+                  <a:lnTo>
+                    <a:pt x="5658179" y="721882"/>
+                  </a:lnTo>
+                  <a:lnTo>
+                    <a:pt x="5586557" y="715644"/>
+                  </a:lnTo>
+                  <a:lnTo>
+                    <a:pt x="5514934" y="709020"/>
+                  </a:lnTo>
+                  <a:lnTo>
+                    <a:pt x="5443311" y="701987"/>
+                  </a:lnTo>
+                  <a:lnTo>
+                    <a:pt x="5371689" y="694520"/>
+                  </a:lnTo>
+                  <a:lnTo>
+                    <a:pt x="5300066" y="686592"/>
+                  </a:lnTo>
+                  <a:lnTo>
+                    <a:pt x="5228444" y="678174"/>
+                  </a:lnTo>
+                  <a:lnTo>
+                    <a:pt x="5156821" y="669236"/>
+                  </a:lnTo>
+                  <a:lnTo>
+                    <a:pt x="5085199" y="659746"/>
+                  </a:lnTo>
+                  <a:lnTo>
+                    <a:pt x="5013576" y="649670"/>
+                  </a:lnTo>
+                  <a:lnTo>
+                    <a:pt x="4941954" y="638971"/>
+                  </a:lnTo>
+                  <a:lnTo>
+                    <a:pt x="4870331" y="627612"/>
+                  </a:lnTo>
+                  <a:lnTo>
+                    <a:pt x="4798709" y="615550"/>
+                  </a:lnTo>
+                  <a:lnTo>
+                    <a:pt x="4727086" y="602744"/>
+                  </a:lnTo>
+                  <a:lnTo>
+                    <a:pt x="4655464" y="589147"/>
+                  </a:lnTo>
+                  <a:lnTo>
+                    <a:pt x="4583841" y="574710"/>
+                  </a:lnTo>
+                  <a:lnTo>
+                    <a:pt x="4512219" y="559381"/>
+                  </a:lnTo>
+                  <a:lnTo>
+                    <a:pt x="4440596" y="543106"/>
+                  </a:lnTo>
+                  <a:lnTo>
+                    <a:pt x="4368974" y="525825"/>
+                  </a:lnTo>
+                  <a:lnTo>
+                    <a:pt x="4297351" y="507477"/>
+                  </a:lnTo>
+                  <a:lnTo>
+                    <a:pt x="4225729" y="487995"/>
+                  </a:lnTo>
+                  <a:lnTo>
+                    <a:pt x="4154106" y="467310"/>
+                  </a:lnTo>
+                  <a:lnTo>
+                    <a:pt x="4082483" y="445347"/>
+                  </a:lnTo>
+                  <a:lnTo>
+                    <a:pt x="4010861" y="422028"/>
+                  </a:lnTo>
+                  <a:lnTo>
+                    <a:pt x="3939238" y="397269"/>
+                  </a:lnTo>
+                  <a:lnTo>
+                    <a:pt x="3867616" y="370980"/>
+                  </a:lnTo>
+                  <a:lnTo>
+                    <a:pt x="3795993" y="343067"/>
+                  </a:lnTo>
+                  <a:lnTo>
+                    <a:pt x="3724371" y="313430"/>
+                  </a:lnTo>
+                  <a:lnTo>
+                    <a:pt x="3652748" y="281963"/>
+                  </a:lnTo>
+                  <a:lnTo>
+                    <a:pt x="3581126" y="248552"/>
+                  </a:lnTo>
+                  <a:lnTo>
+                    <a:pt x="3509503" y="213077"/>
+                  </a:lnTo>
+                  <a:lnTo>
+                    <a:pt x="3437881" y="175411"/>
+                  </a:lnTo>
+                  <a:lnTo>
+                    <a:pt x="3366258" y="135418"/>
+                  </a:lnTo>
+                  <a:lnTo>
+                    <a:pt x="3294636" y="92956"/>
+                  </a:lnTo>
+                  <a:lnTo>
+                    <a:pt x="3223013" y="47870"/>
                   </a:lnTo>
                   <a:lnTo>
                     <a:pt x="3151391" y="0"/>
                   </a:lnTo>
                   <a:lnTo>
-                    <a:pt x="3079768" y="5967"/>
-                  </a:lnTo>
-                  <a:lnTo>
-                    <a:pt x="3008146" y="20592"/>
-                  </a:lnTo>
-                  <a:lnTo>
-                    <a:pt x="2936523" y="34955"/>
-                  </a:lnTo>
-                  <a:lnTo>
-                    <a:pt x="2864901" y="49061"/>
-                  </a:lnTo>
-                  <a:lnTo>
-                    <a:pt x="2793278" y="62914"/>
-                  </a:lnTo>
-                  <a:lnTo>
-                    <a:pt x="2721655" y="76519"/>
-                  </a:lnTo>
-                  <a:lnTo>
-                    <a:pt x="2650033" y="89880"/>
-                  </a:lnTo>
-                  <a:lnTo>
-                    <a:pt x="2578410" y="103002"/>
-                  </a:lnTo>
-                  <a:lnTo>
-                    <a:pt x="2506788" y="115889"/>
-                  </a:lnTo>
-                  <a:lnTo>
-                    <a:pt x="2435165" y="128545"/>
-                  </a:lnTo>
-                  <a:lnTo>
-                    <a:pt x="2363543" y="140975"/>
-                  </a:lnTo>
-                  <a:lnTo>
-                    <a:pt x="2291920" y="153182"/>
-                  </a:lnTo>
-                  <a:lnTo>
-                    <a:pt x="2220298" y="165170"/>
-                  </a:lnTo>
-                  <a:lnTo>
-                    <a:pt x="2148675" y="176944"/>
-                  </a:lnTo>
-                  <a:lnTo>
-                    <a:pt x="2077053" y="188507"/>
-                  </a:lnTo>
-                  <a:lnTo>
-                    <a:pt x="2005430" y="199863"/>
-                  </a:lnTo>
-                  <a:lnTo>
-                    <a:pt x="1933808" y="211015"/>
-                  </a:lnTo>
-                  <a:lnTo>
-                    <a:pt x="1862185" y="221968"/>
-                  </a:lnTo>
-                  <a:lnTo>
-                    <a:pt x="1790563" y="232724"/>
-                  </a:lnTo>
-                  <a:lnTo>
-                    <a:pt x="1718940" y="243288"/>
-                  </a:lnTo>
-                  <a:lnTo>
-                    <a:pt x="1647318" y="253663"/>
-                  </a:lnTo>
-                  <a:lnTo>
-                    <a:pt x="1575695" y="263852"/>
-                  </a:lnTo>
-                  <a:lnTo>
-                    <a:pt x="1504073" y="273858"/>
-                  </a:lnTo>
-                  <a:lnTo>
-                    <a:pt x="1432450" y="283685"/>
-                  </a:lnTo>
-                  <a:lnTo>
-                    <a:pt x="1360827" y="293336"/>
-                  </a:lnTo>
-                  <a:lnTo>
-                    <a:pt x="1289205" y="302815"/>
-                  </a:lnTo>
-                  <a:lnTo>
-                    <a:pt x="1217582" y="312123"/>
-                  </a:lnTo>
-                  <a:lnTo>
-                    <a:pt x="1145960" y="321265"/>
-                  </a:lnTo>
-                  <a:lnTo>
-                    <a:pt x="1074337" y="330244"/>
-                  </a:lnTo>
-                  <a:lnTo>
-                    <a:pt x="1002715" y="339061"/>
-                  </a:lnTo>
-                  <a:lnTo>
-                    <a:pt x="931092" y="347720"/>
-                  </a:lnTo>
-                  <a:lnTo>
-                    <a:pt x="859470" y="356225"/>
-                  </a:lnTo>
-                  <a:lnTo>
-                    <a:pt x="787847" y="364577"/>
-                  </a:lnTo>
-                  <a:lnTo>
-                    <a:pt x="716225" y="372779"/>
-                  </a:lnTo>
-                  <a:lnTo>
-                    <a:pt x="644602" y="380835"/>
-                  </a:lnTo>
-                  <a:lnTo>
-                    <a:pt x="572980" y="388746"/>
-                  </a:lnTo>
-                  <a:lnTo>
-                    <a:pt x="501357" y="396516"/>
-                  </a:lnTo>
-                  <a:lnTo>
-                    <a:pt x="429735" y="404147"/>
-                  </a:lnTo>
-                  <a:lnTo>
-                    <a:pt x="358112" y="411640"/>
-                  </a:lnTo>
-                  <a:lnTo>
-                    <a:pt x="286490" y="419000"/>
-                  </a:lnTo>
-                  <a:lnTo>
-                    <a:pt x="214867" y="426228"/>
-                  </a:lnTo>
-                  <a:lnTo>
-                    <a:pt x="143245" y="433326"/>
-                  </a:lnTo>
-                  <a:lnTo>
-                    <a:pt x="71622" y="440298"/>
-                  </a:lnTo>
-                  <a:lnTo>
-                    <a:pt x="0" y="447144"/>
+                    <a:pt x="3079768" y="6888"/>
+                  </a:lnTo>
+                  <a:lnTo>
+                    <a:pt x="3008146" y="22157"/>
+                  </a:lnTo>
+                  <a:lnTo>
+                    <a:pt x="2936523" y="37140"/>
+                  </a:lnTo>
+                  <a:lnTo>
+                    <a:pt x="2864901" y="51843"/>
+                  </a:lnTo>
+                  <a:lnTo>
+                    <a:pt x="2793278" y="66270"/>
+                  </a:lnTo>
+                  <a:lnTo>
+                    <a:pt x="2721655" y="80428"/>
+                  </a:lnTo>
+                  <a:lnTo>
+                    <a:pt x="2650033" y="94321"/>
+                  </a:lnTo>
+                  <a:lnTo>
+                    <a:pt x="2578410" y="107954"/>
+                  </a:lnTo>
+                  <a:lnTo>
+                    <a:pt x="2506788" y="121332"/>
+                  </a:lnTo>
+                  <a:lnTo>
+                    <a:pt x="2435165" y="134459"/>
+                  </a:lnTo>
+                  <a:lnTo>
+                    <a:pt x="2363543" y="147341"/>
+                  </a:lnTo>
+                  <a:lnTo>
+                    <a:pt x="2291920" y="159982"/>
+                  </a:lnTo>
+                  <a:lnTo>
+                    <a:pt x="2220298" y="172386"/>
+                  </a:lnTo>
+                  <a:lnTo>
+                    <a:pt x="2148675" y="184558"/>
+                  </a:lnTo>
+                  <a:lnTo>
+                    <a:pt x="2077053" y="196503"/>
+                  </a:lnTo>
+                  <a:lnTo>
+                    <a:pt x="2005430" y="208224"/>
+                  </a:lnTo>
+                  <a:lnTo>
+                    <a:pt x="1933808" y="219725"/>
+                  </a:lnTo>
+                  <a:lnTo>
+                    <a:pt x="1862185" y="231011"/>
+                  </a:lnTo>
+                  <a:lnTo>
+                    <a:pt x="1790563" y="242087"/>
+                  </a:lnTo>
+                  <a:lnTo>
+                    <a:pt x="1718940" y="252954"/>
+                  </a:lnTo>
+                  <a:lnTo>
+                    <a:pt x="1647318" y="263619"/>
+                  </a:lnTo>
+                  <a:lnTo>
+                    <a:pt x="1575695" y="274084"/>
+                  </a:lnTo>
+                  <a:lnTo>
+                    <a:pt x="1504073" y="284353"/>
+                  </a:lnTo>
+                  <a:lnTo>
+                    <a:pt x="1432450" y="294430"/>
+                  </a:lnTo>
+                  <a:lnTo>
+                    <a:pt x="1360827" y="304319"/>
+                  </a:lnTo>
+                  <a:lnTo>
+                    <a:pt x="1289205" y="314022"/>
+                  </a:lnTo>
+                  <a:lnTo>
+                    <a:pt x="1217582" y="323544"/>
+                  </a:lnTo>
+                  <a:lnTo>
+                    <a:pt x="1145960" y="332887"/>
+                  </a:lnTo>
+                  <a:lnTo>
+                    <a:pt x="1074337" y="342056"/>
+                  </a:lnTo>
+                  <a:lnTo>
+                    <a:pt x="1002715" y="351053"/>
+                  </a:lnTo>
+                  <a:lnTo>
+                    <a:pt x="931092" y="359882"/>
+                  </a:lnTo>
+                  <a:lnTo>
+                    <a:pt x="859470" y="368546"/>
+                  </a:lnTo>
+                  <a:lnTo>
+                    <a:pt x="787847" y="377047"/>
+                  </a:lnTo>
+                  <a:lnTo>
+                    <a:pt x="716225" y="385390"/>
+                  </a:lnTo>
+                  <a:lnTo>
+                    <a:pt x="644602" y="393576"/>
+                  </a:lnTo>
+                  <a:lnTo>
+                    <a:pt x="572980" y="401610"/>
+                  </a:lnTo>
+                  <a:lnTo>
+                    <a:pt x="501357" y="409492"/>
+                  </a:lnTo>
+                  <a:lnTo>
+                    <a:pt x="429735" y="417228"/>
+                  </a:lnTo>
+                  <a:lnTo>
+                    <a:pt x="358112" y="424818"/>
+                  </a:lnTo>
+                  <a:lnTo>
+                    <a:pt x="286490" y="432267"/>
+                  </a:lnTo>
+                  <a:lnTo>
+                    <a:pt x="214867" y="439576"/>
+                  </a:lnTo>
+                  <a:lnTo>
+                    <a:pt x="143245" y="446749"/>
+                  </a:lnTo>
+                  <a:lnTo>
+                    <a:pt x="71622" y="453787"/>
+                  </a:lnTo>
+                  <a:lnTo>
+                    <a:pt x="0" y="460693"/>
                   </a:lnTo>
                 </a:path>
               </a:pathLst>
@@ -4550,312 +4556,312 @@
           </p:nvSpPr>
           <p:spPr>
             <a:xfrm>
-              <a:off x="1172049" y="3432544"/>
-              <a:ext cx="7090630" cy="1870426"/>
+              <a:off x="1172049" y="3516535"/>
+              <a:ext cx="7090630" cy="1773168"/>
             </a:xfrm>
             <a:custGeom>
               <a:avLst/>
               <a:pathLst>
-                <a:path w="7090630" h="1870426">
+                <a:path w="7090630" h="1773168">
                   <a:moveTo>
                     <a:pt x="0" y="0"/>
                   </a:moveTo>
                   <a:lnTo>
-                    <a:pt x="71622" y="45077"/>
-                  </a:lnTo>
-                  <a:lnTo>
-                    <a:pt x="143245" y="89198"/>
-                  </a:lnTo>
-                  <a:lnTo>
-                    <a:pt x="214867" y="132382"/>
-                  </a:lnTo>
-                  <a:lnTo>
-                    <a:pt x="286490" y="174651"/>
-                  </a:lnTo>
-                  <a:lnTo>
-                    <a:pt x="358112" y="216023"/>
-                  </a:lnTo>
-                  <a:lnTo>
-                    <a:pt x="429735" y="256517"/>
-                  </a:lnTo>
-                  <a:lnTo>
-                    <a:pt x="501357" y="296152"/>
-                  </a:lnTo>
-                  <a:lnTo>
-                    <a:pt x="572980" y="334946"/>
-                  </a:lnTo>
-                  <a:lnTo>
-                    <a:pt x="644602" y="372917"/>
-                  </a:lnTo>
-                  <a:lnTo>
-                    <a:pt x="716225" y="410082"/>
-                  </a:lnTo>
-                  <a:lnTo>
-                    <a:pt x="787847" y="446459"/>
-                  </a:lnTo>
-                  <a:lnTo>
-                    <a:pt x="859470" y="482065"/>
-                  </a:lnTo>
-                  <a:lnTo>
-                    <a:pt x="931092" y="516914"/>
-                  </a:lnTo>
-                  <a:lnTo>
-                    <a:pt x="1002715" y="551025"/>
-                  </a:lnTo>
-                  <a:lnTo>
-                    <a:pt x="1074337" y="584412"/>
-                  </a:lnTo>
-                  <a:lnTo>
-                    <a:pt x="1145960" y="617090"/>
-                  </a:lnTo>
-                  <a:lnTo>
-                    <a:pt x="1217582" y="649075"/>
-                  </a:lnTo>
-                  <a:lnTo>
-                    <a:pt x="1289205" y="680382"/>
-                  </a:lnTo>
-                  <a:lnTo>
-                    <a:pt x="1360827" y="711024"/>
-                  </a:lnTo>
-                  <a:lnTo>
-                    <a:pt x="1432450" y="741017"/>
-                  </a:lnTo>
-                  <a:lnTo>
-                    <a:pt x="1504073" y="770372"/>
-                  </a:lnTo>
-                  <a:lnTo>
-                    <a:pt x="1575695" y="799106"/>
-                  </a:lnTo>
-                  <a:lnTo>
-                    <a:pt x="1647318" y="827229"/>
-                  </a:lnTo>
-                  <a:lnTo>
-                    <a:pt x="1718940" y="854756"/>
-                  </a:lnTo>
-                  <a:lnTo>
-                    <a:pt x="1790563" y="881699"/>
-                  </a:lnTo>
-                  <a:lnTo>
-                    <a:pt x="1862185" y="908070"/>
-                  </a:lnTo>
-                  <a:lnTo>
-                    <a:pt x="1933808" y="933882"/>
-                  </a:lnTo>
-                  <a:lnTo>
-                    <a:pt x="2005430" y="959146"/>
-                  </a:lnTo>
-                  <a:lnTo>
-                    <a:pt x="2077053" y="983874"/>
-                  </a:lnTo>
-                  <a:lnTo>
-                    <a:pt x="2148675" y="1008078"/>
-                  </a:lnTo>
-                  <a:lnTo>
-                    <a:pt x="2220298" y="1031768"/>
-                  </a:lnTo>
-                  <a:lnTo>
-                    <a:pt x="2291920" y="1054956"/>
-                  </a:lnTo>
-                  <a:lnTo>
-                    <a:pt x="2363543" y="1077651"/>
-                  </a:lnTo>
-                  <a:lnTo>
-                    <a:pt x="2435165" y="1099865"/>
-                  </a:lnTo>
-                  <a:lnTo>
-                    <a:pt x="2506788" y="1121608"/>
-                  </a:lnTo>
-                  <a:lnTo>
-                    <a:pt x="2578410" y="1142889"/>
-                  </a:lnTo>
-                  <a:lnTo>
-                    <a:pt x="2650033" y="1163719"/>
-                  </a:lnTo>
-                  <a:lnTo>
-                    <a:pt x="2721655" y="1184107"/>
-                  </a:lnTo>
-                  <a:lnTo>
-                    <a:pt x="2793278" y="1204063"/>
-                  </a:lnTo>
-                  <a:lnTo>
-                    <a:pt x="2864901" y="1223595"/>
-                  </a:lnTo>
-                  <a:lnTo>
-                    <a:pt x="2936523" y="1242712"/>
-                  </a:lnTo>
-                  <a:lnTo>
-                    <a:pt x="3008146" y="1261425"/>
-                  </a:lnTo>
-                  <a:lnTo>
-                    <a:pt x="3079768" y="1279740"/>
-                  </a:lnTo>
-                  <a:lnTo>
-                    <a:pt x="3151391" y="1297666"/>
-                  </a:lnTo>
-                  <a:lnTo>
-                    <a:pt x="3223013" y="1315213"/>
-                  </a:lnTo>
-                  <a:lnTo>
-                    <a:pt x="3294636" y="1332387"/>
-                  </a:lnTo>
-                  <a:lnTo>
-                    <a:pt x="3366258" y="1349196"/>
-                  </a:lnTo>
-                  <a:lnTo>
-                    <a:pt x="3437881" y="1365649"/>
-                  </a:lnTo>
-                  <a:lnTo>
-                    <a:pt x="3509503" y="1381753"/>
-                  </a:lnTo>
-                  <a:lnTo>
-                    <a:pt x="3581126" y="1397515"/>
-                  </a:lnTo>
-                  <a:lnTo>
-                    <a:pt x="3652748" y="1412943"/>
-                  </a:lnTo>
-                  <a:lnTo>
-                    <a:pt x="3724371" y="1428044"/>
-                  </a:lnTo>
-                  <a:lnTo>
-                    <a:pt x="3795993" y="1442824"/>
-                  </a:lnTo>
-                  <a:lnTo>
-                    <a:pt x="3867616" y="1457291"/>
-                  </a:lnTo>
-                  <a:lnTo>
-                    <a:pt x="3939238" y="1471450"/>
-                  </a:lnTo>
-                  <a:lnTo>
-                    <a:pt x="4010861" y="1485309"/>
-                  </a:lnTo>
-                  <a:lnTo>
-                    <a:pt x="4082483" y="1498875"/>
-                  </a:lnTo>
-                  <a:lnTo>
-                    <a:pt x="4154106" y="1512152"/>
-                  </a:lnTo>
-                  <a:lnTo>
-                    <a:pt x="4225729" y="1525148"/>
-                  </a:lnTo>
-                  <a:lnTo>
-                    <a:pt x="4297351" y="1537868"/>
-                  </a:lnTo>
-                  <a:lnTo>
-                    <a:pt x="4368974" y="1550318"/>
-                  </a:lnTo>
-                  <a:lnTo>
-                    <a:pt x="4440596" y="1562504"/>
-                  </a:lnTo>
-                  <a:lnTo>
-                    <a:pt x="4512219" y="1574432"/>
-                  </a:lnTo>
-                  <a:lnTo>
-                    <a:pt x="4583841" y="1586106"/>
-                  </a:lnTo>
-                  <a:lnTo>
-                    <a:pt x="4655464" y="1597533"/>
-                  </a:lnTo>
-                  <a:lnTo>
-                    <a:pt x="4727086" y="1608717"/>
-                  </a:lnTo>
-                  <a:lnTo>
-                    <a:pt x="4798709" y="1619664"/>
-                  </a:lnTo>
-                  <a:lnTo>
-                    <a:pt x="4870331" y="1630379"/>
-                  </a:lnTo>
-                  <a:lnTo>
-                    <a:pt x="4941954" y="1640867"/>
-                  </a:lnTo>
-                  <a:lnTo>
-                    <a:pt x="5013576" y="1651132"/>
-                  </a:lnTo>
-                  <a:lnTo>
-                    <a:pt x="5085199" y="1661179"/>
-                  </a:lnTo>
-                  <a:lnTo>
-                    <a:pt x="5156821" y="1671013"/>
-                  </a:lnTo>
-                  <a:lnTo>
-                    <a:pt x="5228444" y="1680638"/>
-                  </a:lnTo>
-                  <a:lnTo>
-                    <a:pt x="5300066" y="1690059"/>
-                  </a:lnTo>
-                  <a:lnTo>
-                    <a:pt x="5371689" y="1699281"/>
-                  </a:lnTo>
-                  <a:lnTo>
-                    <a:pt x="5443311" y="1708306"/>
-                  </a:lnTo>
-                  <a:lnTo>
-                    <a:pt x="5514934" y="1717141"/>
-                  </a:lnTo>
-                  <a:lnTo>
-                    <a:pt x="5586557" y="1725787"/>
-                  </a:lnTo>
-                  <a:lnTo>
-                    <a:pt x="5658179" y="1734251"/>
-                  </a:lnTo>
-                  <a:lnTo>
-                    <a:pt x="5729802" y="1742535"/>
-                  </a:lnTo>
-                  <a:lnTo>
-                    <a:pt x="5801424" y="1750643"/>
-                  </a:lnTo>
-                  <a:lnTo>
-                    <a:pt x="5873047" y="1758579"/>
-                  </a:lnTo>
-                  <a:lnTo>
-                    <a:pt x="5944669" y="1766346"/>
-                  </a:lnTo>
-                  <a:lnTo>
-                    <a:pt x="6016292" y="1773949"/>
-                  </a:lnTo>
-                  <a:lnTo>
-                    <a:pt x="6087914" y="1781391"/>
-                  </a:lnTo>
-                  <a:lnTo>
-                    <a:pt x="6159537" y="1788674"/>
-                  </a:lnTo>
-                  <a:lnTo>
-                    <a:pt x="6231159" y="1795803"/>
-                  </a:lnTo>
-                  <a:lnTo>
-                    <a:pt x="6302782" y="1802781"/>
-                  </a:lnTo>
-                  <a:lnTo>
-                    <a:pt x="6374404" y="1809611"/>
-                  </a:lnTo>
-                  <a:lnTo>
-                    <a:pt x="6446027" y="1816296"/>
-                  </a:lnTo>
-                  <a:lnTo>
-                    <a:pt x="6517649" y="1822839"/>
-                  </a:lnTo>
-                  <a:lnTo>
-                    <a:pt x="6589272" y="1829244"/>
-                  </a:lnTo>
-                  <a:lnTo>
-                    <a:pt x="6660894" y="1835512"/>
-                  </a:lnTo>
-                  <a:lnTo>
-                    <a:pt x="6732517" y="1841647"/>
-                  </a:lnTo>
-                  <a:lnTo>
-                    <a:pt x="6804139" y="1847653"/>
-                  </a:lnTo>
-                  <a:lnTo>
-                    <a:pt x="6875762" y="1853531"/>
-                  </a:lnTo>
-                  <a:lnTo>
-                    <a:pt x="6947385" y="1859284"/>
-                  </a:lnTo>
-                  <a:lnTo>
-                    <a:pt x="7019007" y="1864915"/>
-                  </a:lnTo>
-                  <a:lnTo>
-                    <a:pt x="7090630" y="1870426"/>
+                    <a:pt x="71622" y="41454"/>
+                  </a:lnTo>
+                  <a:lnTo>
+                    <a:pt x="143245" y="82066"/>
+                  </a:lnTo>
+                  <a:lnTo>
+                    <a:pt x="214867" y="121854"/>
+                  </a:lnTo>
+                  <a:lnTo>
+                    <a:pt x="286490" y="160833"/>
+                  </a:lnTo>
+                  <a:lnTo>
+                    <a:pt x="358112" y="199020"/>
+                  </a:lnTo>
+                  <a:lnTo>
+                    <a:pt x="429735" y="236432"/>
+                  </a:lnTo>
+                  <a:lnTo>
+                    <a:pt x="501357" y="273084"/>
+                  </a:lnTo>
+                  <a:lnTo>
+                    <a:pt x="572980" y="308991"/>
+                  </a:lnTo>
+                  <a:lnTo>
+                    <a:pt x="644602" y="344168"/>
+                  </a:lnTo>
+                  <a:lnTo>
+                    <a:pt x="716225" y="378631"/>
+                  </a:lnTo>
+                  <a:lnTo>
+                    <a:pt x="787847" y="412395"/>
+                  </a:lnTo>
+                  <a:lnTo>
+                    <a:pt x="859470" y="445472"/>
+                  </a:lnTo>
+                  <a:lnTo>
+                    <a:pt x="931092" y="477877"/>
+                  </a:lnTo>
+                  <a:lnTo>
+                    <a:pt x="1002715" y="509624"/>
+                  </a:lnTo>
+                  <a:lnTo>
+                    <a:pt x="1074337" y="540726"/>
+                  </a:lnTo>
+                  <a:lnTo>
+                    <a:pt x="1145960" y="571196"/>
+                  </a:lnTo>
+                  <a:lnTo>
+                    <a:pt x="1217582" y="601048"/>
+                  </a:lnTo>
+                  <a:lnTo>
+                    <a:pt x="1289205" y="630293"/>
+                  </a:lnTo>
+                  <a:lnTo>
+                    <a:pt x="1360827" y="658944"/>
+                  </a:lnTo>
+                  <a:lnTo>
+                    <a:pt x="1432450" y="687012"/>
+                  </a:lnTo>
+                  <a:lnTo>
+                    <a:pt x="1504073" y="714511"/>
+                  </a:lnTo>
+                  <a:lnTo>
+                    <a:pt x="1575695" y="741451"/>
+                  </a:lnTo>
+                  <a:lnTo>
+                    <a:pt x="1647318" y="767844"/>
+                  </a:lnTo>
+                  <a:lnTo>
+                    <a:pt x="1718940" y="793701"/>
+                  </a:lnTo>
+                  <a:lnTo>
+                    <a:pt x="1790563" y="819032"/>
+                  </a:lnTo>
+                  <a:lnTo>
+                    <a:pt x="1862185" y="843849"/>
+                  </a:lnTo>
+                  <a:lnTo>
+                    <a:pt x="1933808" y="868162"/>
+                  </a:lnTo>
+                  <a:lnTo>
+                    <a:pt x="2005430" y="891981"/>
+                  </a:lnTo>
+                  <a:lnTo>
+                    <a:pt x="2077053" y="915316"/>
+                  </a:lnTo>
+                  <a:lnTo>
+                    <a:pt x="2148675" y="938177"/>
+                  </a:lnTo>
+                  <a:lnTo>
+                    <a:pt x="2220298" y="960573"/>
+                  </a:lnTo>
+                  <a:lnTo>
+                    <a:pt x="2291920" y="982515"/>
+                  </a:lnTo>
+                  <a:lnTo>
+                    <a:pt x="2363543" y="1004011"/>
+                  </a:lnTo>
+                  <a:lnTo>
+                    <a:pt x="2435165" y="1025070"/>
+                  </a:lnTo>
+                  <a:lnTo>
+                    <a:pt x="2506788" y="1045702"/>
+                  </a:lnTo>
+                  <a:lnTo>
+                    <a:pt x="2578410" y="1065914"/>
+                  </a:lnTo>
+                  <a:lnTo>
+                    <a:pt x="2650033" y="1085716"/>
+                  </a:lnTo>
+                  <a:lnTo>
+                    <a:pt x="2721655" y="1105116"/>
+                  </a:lnTo>
+                  <a:lnTo>
+                    <a:pt x="2793278" y="1124121"/>
+                  </a:lnTo>
+                  <a:lnTo>
+                    <a:pt x="2864901" y="1142740"/>
+                  </a:lnTo>
+                  <a:lnTo>
+                    <a:pt x="2936523" y="1160982"/>
+                  </a:lnTo>
+                  <a:lnTo>
+                    <a:pt x="3008146" y="1178852"/>
+                  </a:lnTo>
+                  <a:lnTo>
+                    <a:pt x="3079768" y="1196360"/>
+                  </a:lnTo>
+                  <a:lnTo>
+                    <a:pt x="3151391" y="1213512"/>
+                  </a:lnTo>
+                  <a:lnTo>
+                    <a:pt x="3223013" y="1230315"/>
+                  </a:lnTo>
+                  <a:lnTo>
+                    <a:pt x="3294636" y="1246778"/>
+                  </a:lnTo>
+                  <a:lnTo>
+                    <a:pt x="3366258" y="1262905"/>
+                  </a:lnTo>
+                  <a:lnTo>
+                    <a:pt x="3437881" y="1278706"/>
+                  </a:lnTo>
+                  <a:lnTo>
+                    <a:pt x="3509503" y="1294185"/>
+                  </a:lnTo>
+                  <a:lnTo>
+                    <a:pt x="3581126" y="1309350"/>
+                  </a:lnTo>
+                  <a:lnTo>
+                    <a:pt x="3652748" y="1324206"/>
+                  </a:lnTo>
+                  <a:lnTo>
+                    <a:pt x="3724371" y="1338761"/>
+                  </a:lnTo>
+                  <a:lnTo>
+                    <a:pt x="3795993" y="1353020"/>
+                  </a:lnTo>
+                  <a:lnTo>
+                    <a:pt x="3867616" y="1366990"/>
+                  </a:lnTo>
+                  <a:lnTo>
+                    <a:pt x="3939238" y="1380676"/>
+                  </a:lnTo>
+                  <a:lnTo>
+                    <a:pt x="4010861" y="1394084"/>
+                  </a:lnTo>
+                  <a:lnTo>
+                    <a:pt x="4082483" y="1407219"/>
+                  </a:lnTo>
+                  <a:lnTo>
+                    <a:pt x="4154106" y="1420088"/>
+                  </a:lnTo>
+                  <a:lnTo>
+                    <a:pt x="4225729" y="1432695"/>
+                  </a:lnTo>
+                  <a:lnTo>
+                    <a:pt x="4297351" y="1445046"/>
+                  </a:lnTo>
+                  <a:lnTo>
+                    <a:pt x="4368974" y="1457146"/>
+                  </a:lnTo>
+                  <a:lnTo>
+                    <a:pt x="4440596" y="1469001"/>
+                  </a:lnTo>
+                  <a:lnTo>
+                    <a:pt x="4512219" y="1480614"/>
+                  </a:lnTo>
+                  <a:lnTo>
+                    <a:pt x="4583841" y="1491992"/>
+                  </a:lnTo>
+                  <a:lnTo>
+                    <a:pt x="4655464" y="1503139"/>
+                  </a:lnTo>
+                  <a:lnTo>
+                    <a:pt x="4727086" y="1514059"/>
+                  </a:lnTo>
+                  <a:lnTo>
+                    <a:pt x="4798709" y="1524757"/>
+                  </a:lnTo>
+                  <a:lnTo>
+                    <a:pt x="4870331" y="1535238"/>
+                  </a:lnTo>
+                  <a:lnTo>
+                    <a:pt x="4941954" y="1545506"/>
+                  </a:lnTo>
+                  <a:lnTo>
+                    <a:pt x="5013576" y="1555566"/>
+                  </a:lnTo>
+                  <a:lnTo>
+                    <a:pt x="5085199" y="1565421"/>
+                  </a:lnTo>
+                  <a:lnTo>
+                    <a:pt x="5156821" y="1575076"/>
+                  </a:lnTo>
+                  <a:lnTo>
+                    <a:pt x="5228444" y="1584535"/>
+                  </a:lnTo>
+                  <a:lnTo>
+                    <a:pt x="5300066" y="1593801"/>
+                  </a:lnTo>
+                  <a:lnTo>
+                    <a:pt x="5371689" y="1602880"/>
+                  </a:lnTo>
+                  <a:lnTo>
+                    <a:pt x="5443311" y="1611774"/>
+                  </a:lnTo>
+                  <a:lnTo>
+                    <a:pt x="5514934" y="1620487"/>
+                  </a:lnTo>
+                  <a:lnTo>
+                    <a:pt x="5586557" y="1629024"/>
+                  </a:lnTo>
+                  <a:lnTo>
+                    <a:pt x="5658179" y="1637387"/>
+                  </a:lnTo>
+                  <a:lnTo>
+                    <a:pt x="5729802" y="1645580"/>
+                  </a:lnTo>
+                  <a:lnTo>
+                    <a:pt x="5801424" y="1653606"/>
+                  </a:lnTo>
+                  <a:lnTo>
+                    <a:pt x="5873047" y="1661470"/>
+                  </a:lnTo>
+                  <a:lnTo>
+                    <a:pt x="5944669" y="1669174"/>
+                  </a:lnTo>
+                  <a:lnTo>
+                    <a:pt x="6016292" y="1676721"/>
+                  </a:lnTo>
+                  <a:lnTo>
+                    <a:pt x="6087914" y="1684115"/>
+                  </a:lnTo>
+                  <a:lnTo>
+                    <a:pt x="6159537" y="1691359"/>
+                  </a:lnTo>
+                  <a:lnTo>
+                    <a:pt x="6231159" y="1698456"/>
+                  </a:lnTo>
+                  <a:lnTo>
+                    <a:pt x="6302782" y="1705408"/>
+                  </a:lnTo>
+                  <a:lnTo>
+                    <a:pt x="6374404" y="1712220"/>
+                  </a:lnTo>
+                  <a:lnTo>
+                    <a:pt x="6446027" y="1718893"/>
+                  </a:lnTo>
+                  <a:lnTo>
+                    <a:pt x="6517649" y="1725430"/>
+                  </a:lnTo>
+                  <a:lnTo>
+                    <a:pt x="6589272" y="1731835"/>
+                  </a:lnTo>
+                  <a:lnTo>
+                    <a:pt x="6660894" y="1738109"/>
+                  </a:lnTo>
+                  <a:lnTo>
+                    <a:pt x="6732517" y="1744256"/>
+                  </a:lnTo>
+                  <a:lnTo>
+                    <a:pt x="6804139" y="1750278"/>
+                  </a:lnTo>
+                  <a:lnTo>
+                    <a:pt x="6875762" y="1756178"/>
+                  </a:lnTo>
+                  <a:lnTo>
+                    <a:pt x="6947385" y="1761958"/>
+                  </a:lnTo>
+                  <a:lnTo>
+                    <a:pt x="7019007" y="1767621"/>
+                  </a:lnTo>
+                  <a:lnTo>
+                    <a:pt x="7090630" y="1773168"/>
                   </a:lnTo>
                 </a:path>
               </a:pathLst>
@@ -4927,7 +4933,7 @@
           </p:nvSpPr>
           <p:spPr>
             <a:xfrm>
-              <a:off x="4313661" y="2073503"/>
+              <a:off x="4313914" y="2073503"/>
               <a:ext cx="0" cy="3649639"/>
             </a:xfrm>
             <a:custGeom>
@@ -5200,7 +5206,7 @@
           </p:nvSpPr>
           <p:spPr>
             <a:xfrm>
-              <a:off x="1343342" y="5785772"/>
+              <a:off x="1344940" y="5785772"/>
               <a:ext cx="161574" cy="80101"/>
             </a:xfrm>
             <a:prstGeom prst="rect">
@@ -5246,7 +5252,7 @@
           </p:nvSpPr>
           <p:spPr>
             <a:xfrm>
-              <a:off x="2280620" y="5785772"/>
+              <a:off x="2281218" y="5785772"/>
               <a:ext cx="161574" cy="80101"/>
             </a:xfrm>
             <a:prstGeom prst="rect">
@@ -5292,7 +5298,7 @@
           </p:nvSpPr>
           <p:spPr>
             <a:xfrm>
-              <a:off x="3217897" y="5785772"/>
+              <a:off x="3217496" y="5785772"/>
               <a:ext cx="161574" cy="80101"/>
             </a:xfrm>
             <a:prstGeom prst="rect">
@@ -5338,7 +5344,7 @@
           </p:nvSpPr>
           <p:spPr>
             <a:xfrm>
-              <a:off x="4204872" y="5785772"/>
+              <a:off x="4203472" y="5785772"/>
               <a:ext cx="62179" cy="80101"/>
             </a:xfrm>
             <a:prstGeom prst="rect">
@@ -5384,7 +5390,7 @@
           </p:nvSpPr>
           <p:spPr>
             <a:xfrm>
-              <a:off x="5111060" y="5785772"/>
+              <a:off x="5108660" y="5785772"/>
               <a:ext cx="124358" cy="80101"/>
             </a:xfrm>
             <a:prstGeom prst="rect">
@@ -5430,7 +5436,7 @@
           </p:nvSpPr>
           <p:spPr>
             <a:xfrm>
-              <a:off x="6048338" y="5785772"/>
+              <a:off x="6044938" y="5785772"/>
               <a:ext cx="124358" cy="80101"/>
             </a:xfrm>
             <a:prstGeom prst="rect">
@@ -5476,7 +5482,7 @@
           </p:nvSpPr>
           <p:spPr>
             <a:xfrm>
-              <a:off x="6985615" y="5785772"/>
+              <a:off x="6981216" y="5785772"/>
               <a:ext cx="124358" cy="80101"/>
             </a:xfrm>
             <a:prstGeom prst="rect">
@@ -5522,7 +5528,7 @@
           </p:nvSpPr>
           <p:spPr>
             <a:xfrm>
-              <a:off x="7922893" y="5785772"/>
+              <a:off x="7917494" y="5785772"/>
               <a:ext cx="124358" cy="80101"/>
             </a:xfrm>
             <a:prstGeom prst="rect">
@@ -5693,7 +5699,7 @@
                   <a:latin typeface="Helvetica"/>
                   <a:cs typeface="Helvetica"/>
                 </a:rPr>
-                <a:t>subHR per 10 % decline: 1.32 (0.79-2.22), p = 0.287  |  per IQR decline (Δ = 25.8 %): 2.06 (0.54-7.85)  |  IQR: [-10.7, 15.1] %</a:t>
+                <a:t>subHR per 10 % decline: 1.31 (0.78-2.19), p = 0.307  |  per IQR decline (Δ = 25.8 %): 2.00 (0.53-7.55)  |  IQR: [-10.6, 15.2] %</a:t>
               </a:r>
             </a:p>
           </p:txBody>
